--- a/Presentaciones/othermodels_equipo_08.pptx
+++ b/Presentaciones/othermodels_equipo_08.pptx
@@ -5,11 +5,12 @@
     <p:sldMasterId id="2147483648" r:id="rId1"/>
   </p:sldMasterIdLst>
   <p:notesMasterIdLst>
-    <p:notesMasterId r:id="rId4"/>
+    <p:notesMasterId r:id="rId5"/>
   </p:notesMasterIdLst>
   <p:sldIdLst>
     <p:sldId id="264" r:id="rId2"/>
     <p:sldId id="265" r:id="rId3"/>
+    <p:sldId id="266" r:id="rId4"/>
   </p:sldIdLst>
   <p:sldSz cx="9144000" cy="6858000" type="screen4x3"/>
   <p:notesSz cx="6858000" cy="9144000"/>
@@ -281,7 +282,7 @@
               <a:pPr>
                 <a:defRPr/>
               </a:pPr>
-              <a:t>18/10/2025</a:t>
+              <a:t>20/10/2025</a:t>
             </a:fld>
             <a:endParaRPr lang="es-CO"/>
           </a:p>
@@ -713,7 +714,7 @@
                 <a:spcPct val="0"/>
               </a:spcBef>
             </a:pPr>
-            <a:endParaRPr lang="es-CO" altLang="es-CO" smtClean="0"/>
+            <a:endParaRPr lang="es-CO" altLang="es-CO"/>
           </a:p>
         </p:txBody>
       </p:sp>
@@ -879,7 +880,7 @@
               </a:pPr>
               <a:t>1</a:t>
             </a:fld>
-            <a:endParaRPr lang="es-CO" altLang="es-CO" smtClean="0"/>
+            <a:endParaRPr lang="es-CO" altLang="es-CO"/>
           </a:p>
         </p:txBody>
       </p:sp>
@@ -3414,30 +3415,22 @@
               <a:rPr lang="es-CO" altLang="es-CO" dirty="0"/>
             </a:br>
             <a:r>
-              <a:rPr lang="es-CO" altLang="es-CO" dirty="0" smtClean="0"/>
+              <a:rPr lang="es-CO" altLang="es-CO" dirty="0"/>
               <a:t>LAURA DANIELA DIAZ TORRES</a:t>
-            </a:r>
-            <a:br>
-              <a:rPr lang="es-CO" altLang="es-CO" dirty="0" smtClean="0"/>
-            </a:br>
-            <a:r>
-              <a:rPr lang="es-CO" altLang="es-CO" dirty="0" smtClean="0"/>
-              <a:t>CRISTIAN FELIPE MUÑOZ </a:t>
-            </a:r>
-            <a:r>
-              <a:rPr lang="es-CO" altLang="es-CO" dirty="0"/>
-              <a:t>GUERRERO</a:t>
             </a:r>
             <a:br>
               <a:rPr lang="es-CO" altLang="es-CO" dirty="0"/>
             </a:br>
             <a:r>
               <a:rPr lang="es-CO" altLang="es-CO" dirty="0"/>
-              <a:t>ZENNETH OLIVERO </a:t>
-            </a:r>
-            <a:r>
-              <a:rPr lang="es-CO" altLang="es-CO" dirty="0" smtClean="0"/>
-              <a:t>TAPIA</a:t>
+              <a:t>CRISTIAN FELIPE MUÑOZ GUERRERO</a:t>
+            </a:r>
+            <a:br>
+              <a:rPr lang="es-CO" altLang="es-CO" dirty="0"/>
+            </a:br>
+            <a:r>
+              <a:rPr lang="es-CO" altLang="es-CO" dirty="0"/>
+              <a:t>ZENETH OLIVERO TAPIA</a:t>
             </a:r>
           </a:p>
         </p:txBody>
@@ -3477,63 +3470,26 @@
               <a:defRPr/>
             </a:pPr>
             <a:r>
-              <a:rPr lang="es-CO" b="1" dirty="0" err="1" smtClean="0"/>
+              <a:rPr lang="es-CO" b="1" dirty="0" err="1"/>
               <a:t>Problem</a:t>
             </a:r>
             <a:r>
-              <a:rPr lang="es-CO" b="1" dirty="0" smtClean="0"/>
+              <a:rPr lang="es-CO" b="1" dirty="0"/>
               <a:t> Set 2 – </a:t>
             </a:r>
             <a:r>
-              <a:rPr lang="es-CO" b="1" dirty="0" err="1" smtClean="0"/>
+              <a:rPr lang="es-CO" b="1" dirty="0" err="1"/>
               <a:t>Predicting</a:t>
             </a:r>
             <a:r>
-              <a:rPr lang="es-CO" b="1" dirty="0" smtClean="0"/>
+              <a:rPr lang="es-CO" b="1" dirty="0"/>
               <a:t> </a:t>
             </a:r>
             <a:r>
-              <a:rPr lang="es-CO" b="1" dirty="0" err="1" smtClean="0"/>
+              <a:rPr lang="es-CO" b="1" dirty="0" err="1"/>
               <a:t>Poverty</a:t>
             </a:r>
             <a:endParaRPr lang="es-CO" b="1" dirty="0"/>
-          </a:p>
-          <a:p>
-            <a:pPr eaLnBrk="1" fontAlgn="auto" hangingPunct="1">
-              <a:spcAft>
-                <a:spcPts val="0"/>
-              </a:spcAft>
-              <a:defRPr/>
-            </a:pPr>
-            <a:endParaRPr lang="es-CO" b="1" dirty="0" smtClean="0"/>
-          </a:p>
-          <a:p>
-            <a:pPr eaLnBrk="1" fontAlgn="auto" hangingPunct="1">
-              <a:spcAft>
-                <a:spcPts val="0"/>
-              </a:spcAft>
-              <a:defRPr/>
-            </a:pPr>
-            <a:r>
-              <a:rPr lang="es-CO" b="1" dirty="0" smtClean="0"/>
-              <a:t>BIG </a:t>
-            </a:r>
-            <a:r>
-              <a:rPr lang="es-CO" b="1" dirty="0"/>
-              <a:t>DATA Y MACHINE LEARNING PARA ECONOMIA APLICADA</a:t>
-            </a:r>
-          </a:p>
-          <a:p>
-            <a:pPr eaLnBrk="1" fontAlgn="auto" hangingPunct="1">
-              <a:spcAft>
-                <a:spcPts val="0"/>
-              </a:spcAft>
-              <a:defRPr/>
-            </a:pPr>
-            <a:r>
-              <a:rPr lang="es-CO" b="1" dirty="0" smtClean="0"/>
-              <a:t>2025-02</a:t>
-            </a:r>
           </a:p>
           <a:p>
             <a:pPr eaLnBrk="1" fontAlgn="auto" hangingPunct="1">
@@ -3552,8 +3508,8 @@
               <a:defRPr/>
             </a:pPr>
             <a:r>
-              <a:rPr lang="es-CO" dirty="0" smtClean="0"/>
-              <a:t>data_equipo_08</a:t>
+              <a:rPr lang="es-CO" b="1" dirty="0"/>
+              <a:t>BIG DATA Y MACHINE LEARNING PARA ECONOMIA APLICADA</a:t>
             </a:r>
           </a:p>
           <a:p>
@@ -3564,10 +3520,42 @@
               <a:defRPr/>
             </a:pPr>
             <a:r>
-              <a:rPr lang="es-CO" b="1" dirty="0" smtClean="0"/>
+              <a:rPr lang="es-CO" b="1" dirty="0"/>
+              <a:t>2025-02</a:t>
+            </a:r>
+          </a:p>
+          <a:p>
+            <a:pPr eaLnBrk="1" fontAlgn="auto" hangingPunct="1">
+              <a:spcAft>
+                <a:spcPts val="0"/>
+              </a:spcAft>
+              <a:defRPr/>
+            </a:pPr>
+            <a:endParaRPr lang="es-CO" b="1" dirty="0"/>
+          </a:p>
+          <a:p>
+            <a:pPr eaLnBrk="1" fontAlgn="auto" hangingPunct="1">
+              <a:spcAft>
+                <a:spcPts val="0"/>
+              </a:spcAft>
+              <a:defRPr/>
+            </a:pPr>
+            <a:r>
+              <a:rPr lang="es-CO" dirty="0"/>
+              <a:t>othermodels_equipo_08</a:t>
+            </a:r>
+          </a:p>
+          <a:p>
+            <a:pPr eaLnBrk="1" fontAlgn="auto" hangingPunct="1">
+              <a:spcAft>
+                <a:spcPts val="0"/>
+              </a:spcAft>
+              <a:defRPr/>
+            </a:pPr>
+            <a:r>
+              <a:rPr lang="es-CO" b="1" dirty="0"/>
               <a:t>Limpieza de datos, transformación de variables, definición de bases de datos finales.</a:t>
             </a:r>
-            <a:endParaRPr lang="es-CO" b="1" dirty="0"/>
           </a:p>
         </p:txBody>
       </p:sp>
@@ -3581,13 +3569,6 @@
   <p:clrMapOvr>
     <a:masterClrMapping/>
   </p:clrMapOvr>
-  <p:timing>
-    <p:tnLst>
-      <p:par>
-        <p:cTn id="1" dur="indefinite" restart="never" nodeType="tmRoot"/>
-      </p:par>
-    </p:tnLst>
-  </p:timing>
 </p:sld>
 </file>
 
@@ -3629,7 +3610,38 @@
           <a:lstStyle/>
           <a:p>
             <a:pPr algn="ctr"/>
-            <a:endParaRPr lang="es-CO" altLang="es-CO" dirty="0" smtClean="0"/>
+            <a:r>
+              <a:rPr lang="es-CO" altLang="es-CO" dirty="0" err="1"/>
+              <a:t>Best</a:t>
+            </a:r>
+            <a:r>
+              <a:rPr lang="es-CO" altLang="es-CO" dirty="0"/>
+              <a:t> </a:t>
+            </a:r>
+            <a:r>
+              <a:rPr lang="es-CO" altLang="es-CO" dirty="0" err="1"/>
+              <a:t>model</a:t>
+            </a:r>
+            <a:r>
+              <a:rPr lang="es-CO" altLang="es-CO" dirty="0"/>
+              <a:t> </a:t>
+            </a:r>
+            <a:r>
+              <a:rPr lang="es-CO" altLang="es-CO" dirty="0" err="1"/>
+              <a:t>overview</a:t>
+            </a:r>
+            <a:r>
+              <a:rPr lang="es-CO" altLang="es-CO" dirty="0"/>
+              <a:t> – </a:t>
+            </a:r>
+            <a:r>
+              <a:rPr lang="es-CO" altLang="es-CO" dirty="0" err="1"/>
+              <a:t>XGBoost</a:t>
+            </a:r>
+            <a:r>
+              <a:rPr lang="es-CO" altLang="es-CO" dirty="0"/>
+              <a:t> + CART Ensemble</a:t>
+            </a:r>
           </a:p>
         </p:txBody>
       </p:sp>
@@ -3643,15 +3655,70 @@
             <p:ph idx="1"/>
           </p:nvPr>
         </p:nvSpPr>
-        <p:spPr/>
+        <p:spPr>
+          <a:xfrm>
+            <a:off x="1040708" y="4910286"/>
+            <a:ext cx="7858125" cy="1432743"/>
+          </a:xfrm>
+        </p:spPr>
         <p:txBody>
           <a:bodyPr/>
           <a:lstStyle/>
           <a:p>
-            <a:endParaRPr lang="es-CO"/>
-          </a:p>
-        </p:txBody>
-      </p:sp>
+            <a:r>
+              <a:rPr lang="es-ES" dirty="0"/>
+              <a:t>El modelo fue seleccionado porque logra </a:t>
+            </a:r>
+            <a:r>
+              <a:rPr lang="es-ES" b="1" dirty="0"/>
+              <a:t>mayor estabilidad y precisión</a:t>
+            </a:r>
+            <a:r>
+              <a:rPr lang="es-ES" dirty="0"/>
+              <a:t>, mejorando el F1-score frente a todos los modelos individuales y manteniendo una estructura explicativa que facilita su interpretación.</a:t>
+            </a:r>
+          </a:p>
+          <a:p>
+            <a:endParaRPr lang="es-CO" dirty="0"/>
+          </a:p>
+        </p:txBody>
+      </p:sp>
+      <p:pic>
+        <p:nvPicPr>
+          <p:cNvPr id="4" name="Imagen 3">
+            <a:extLst>
+              <a:ext uri="{FF2B5EF4-FFF2-40B4-BE49-F238E27FC236}">
+                <a16:creationId xmlns:a16="http://schemas.microsoft.com/office/drawing/2014/main" id="{48A075A8-D2AE-5612-F40B-46A7C27FDA7B}"/>
+              </a:ext>
+            </a:extLst>
+          </p:cNvPr>
+          <p:cNvPicPr>
+            <a:picLocks noChangeAspect="1"/>
+          </p:cNvPicPr>
+          <p:nvPr/>
+        </p:nvPicPr>
+        <p:blipFill>
+          <a:blip r:embed="rId2">
+            <a:extLst>
+              <a:ext uri="{28A0092B-C50C-407E-A947-70E740481C1C}">
+                <a14:useLocalDpi xmlns:a14="http://schemas.microsoft.com/office/drawing/2010/main" val="0"/>
+              </a:ext>
+            </a:extLst>
+          </a:blip>
+          <a:stretch>
+            <a:fillRect/>
+          </a:stretch>
+        </p:blipFill>
+        <p:spPr>
+          <a:xfrm>
+            <a:off x="0" y="1928290"/>
+            <a:ext cx="9144000" cy="2429917"/>
+          </a:xfrm>
+          <a:prstGeom prst="rect">
+            <a:avLst/>
+          </a:prstGeom>
+        </p:spPr>
+      </p:pic>
     </p:spTree>
     <p:extLst>
       <p:ext uri="{BB962C8B-B14F-4D97-AF65-F5344CB8AC3E}">
@@ -3662,13 +3729,86 @@
   <p:clrMapOvr>
     <a:masterClrMapping/>
   </p:clrMapOvr>
-  <p:timing>
-    <p:tnLst>
-      <p:par>
-        <p:cTn id="1" dur="indefinite" restart="never" nodeType="tmRoot"/>
-      </p:par>
-    </p:tnLst>
-  </p:timing>
+</p:sld>
+</file>
+
+<file path=ppt/slides/slide3.xml><?xml version="1.0" encoding="utf-8"?>
+<p:sld xmlns:a="http://schemas.openxmlformats.org/drawingml/2006/main" xmlns:r="http://schemas.openxmlformats.org/officeDocument/2006/relationships" xmlns:p="http://schemas.openxmlformats.org/presentationml/2006/main">
+  <p:cSld>
+    <p:spTree>
+      <p:nvGrpSpPr>
+        <p:cNvPr id="1" name=""/>
+        <p:cNvGrpSpPr/>
+        <p:nvPr/>
+      </p:nvGrpSpPr>
+      <p:grpSpPr>
+        <a:xfrm>
+          <a:off x="0" y="0"/>
+          <a:ext cx="0" cy="0"/>
+          <a:chOff x="0" y="0"/>
+          <a:chExt cx="0" cy="0"/>
+        </a:xfrm>
+      </p:grpSpPr>
+      <p:sp>
+        <p:nvSpPr>
+          <p:cNvPr id="2" name="Título 1">
+            <a:extLst>
+              <a:ext uri="{FF2B5EF4-FFF2-40B4-BE49-F238E27FC236}">
+                <a16:creationId xmlns:a16="http://schemas.microsoft.com/office/drawing/2014/main" id="{0CFA7EE9-6336-1A48-2A0F-D1E429F1747E}"/>
+              </a:ext>
+            </a:extLst>
+          </p:cNvPr>
+          <p:cNvSpPr>
+            <a:spLocks noGrp="1"/>
+          </p:cNvSpPr>
+          <p:nvPr>
+            <p:ph type="title"/>
+          </p:nvPr>
+        </p:nvSpPr>
+        <p:spPr/>
+        <p:txBody>
+          <a:bodyPr/>
+          <a:lstStyle/>
+          <a:p>
+            <a:endParaRPr lang="en-US"/>
+          </a:p>
+        </p:txBody>
+      </p:sp>
+      <p:sp>
+        <p:nvSpPr>
+          <p:cNvPr id="3" name="Marcador de contenido 2">
+            <a:extLst>
+              <a:ext uri="{FF2B5EF4-FFF2-40B4-BE49-F238E27FC236}">
+                <a16:creationId xmlns:a16="http://schemas.microsoft.com/office/drawing/2014/main" id="{4CC0AB18-FD2D-46FE-037D-E70A25A6B168}"/>
+              </a:ext>
+            </a:extLst>
+          </p:cNvPr>
+          <p:cNvSpPr>
+            <a:spLocks noGrp="1"/>
+          </p:cNvSpPr>
+          <p:nvPr>
+            <p:ph idx="1"/>
+          </p:nvPr>
+        </p:nvSpPr>
+        <p:spPr/>
+        <p:txBody>
+          <a:bodyPr/>
+          <a:lstStyle/>
+          <a:p>
+            <a:endParaRPr lang="en-US"/>
+          </a:p>
+        </p:txBody>
+      </p:sp>
+    </p:spTree>
+    <p:extLst>
+      <p:ext uri="{BB962C8B-B14F-4D97-AF65-F5344CB8AC3E}">
+        <p14:creationId xmlns:p14="http://schemas.microsoft.com/office/powerpoint/2010/main" val="146639435"/>
+      </p:ext>
+    </p:extLst>
+  </p:cSld>
+  <p:clrMapOvr>
+    <a:masterClrMapping/>
+  </p:clrMapOvr>
 </p:sld>
 </file>
 

--- a/Presentaciones/othermodels_equipo_08.pptx
+++ b/Presentaciones/othermodels_equipo_08.pptx
@@ -3685,10 +3685,10 @@
       </p:sp>
       <p:pic>
         <p:nvPicPr>
-          <p:cNvPr id="4" name="Imagen 3">
+          <p:cNvPr id="5" name="Imagen 4">
             <a:extLst>
               <a:ext uri="{FF2B5EF4-FFF2-40B4-BE49-F238E27FC236}">
-                <a16:creationId xmlns:a16="http://schemas.microsoft.com/office/drawing/2014/main" id="{48A075A8-D2AE-5612-F40B-46A7C27FDA7B}"/>
+                <a16:creationId xmlns:a16="http://schemas.microsoft.com/office/drawing/2014/main" id="{A8983FE9-07D1-066B-992A-8342F7FFC68E}"/>
               </a:ext>
             </a:extLst>
           </p:cNvPr>
@@ -3711,8 +3711,8 @@
         </p:blipFill>
         <p:spPr>
           <a:xfrm>
-            <a:off x="0" y="1928290"/>
-            <a:ext cx="9144000" cy="2429917"/>
+            <a:off x="0" y="2083759"/>
+            <a:ext cx="9144000" cy="2690481"/>
           </a:xfrm>
           <a:prstGeom prst="rect">
             <a:avLst/>

--- a/Presentaciones/othermodels_equipo_08.pptx
+++ b/Presentaciones/othermodels_equipo_08.pptx
@@ -5,12 +5,15 @@
     <p:sldMasterId id="2147483648" r:id="rId1"/>
   </p:sldMasterIdLst>
   <p:notesMasterIdLst>
-    <p:notesMasterId r:id="rId5"/>
+    <p:notesMasterId r:id="rId8"/>
   </p:notesMasterIdLst>
   <p:sldIdLst>
     <p:sldId id="264" r:id="rId2"/>
     <p:sldId id="265" r:id="rId3"/>
     <p:sldId id="266" r:id="rId4"/>
+    <p:sldId id="267" r:id="rId5"/>
+    <p:sldId id="268" r:id="rId6"/>
+    <p:sldId id="269" r:id="rId7"/>
   </p:sldIdLst>
   <p:sldSz cx="9144000" cy="6858000" type="screen4x3"/>
   <p:notesSz cx="6858000" cy="9144000"/>
@@ -3765,21 +3768,171 @@
             <p:ph type="title"/>
           </p:nvPr>
         </p:nvSpPr>
-        <p:spPr/>
+        <p:spPr>
+          <a:xfrm>
+            <a:off x="1115616" y="1102274"/>
+            <a:ext cx="8229600" cy="500062"/>
+          </a:xfrm>
+        </p:spPr>
         <p:txBody>
           <a:bodyPr/>
           <a:lstStyle/>
           <a:p>
-            <a:endParaRPr lang="en-US"/>
+            <a:r>
+              <a:rPr lang="en-US" dirty="0" err="1"/>
+              <a:t>Comparación</a:t>
+            </a:r>
+            <a:r>
+              <a:rPr lang="en-US" dirty="0"/>
+              <a:t> de </a:t>
+            </a:r>
+            <a:r>
+              <a:rPr lang="en-US" dirty="0" err="1"/>
+              <a:t>modelos</a:t>
+            </a:r>
+            <a:endParaRPr lang="en-US" dirty="0"/>
           </a:p>
         </p:txBody>
       </p:sp>
+      <p:pic>
+        <p:nvPicPr>
+          <p:cNvPr id="5" name="Marcador de contenido 4">
+            <a:extLst>
+              <a:ext uri="{FF2B5EF4-FFF2-40B4-BE49-F238E27FC236}">
+                <a16:creationId xmlns:a16="http://schemas.microsoft.com/office/drawing/2014/main" id="{5CDEE2FF-3160-6F4F-7E33-48E58AC78298}"/>
+              </a:ext>
+            </a:extLst>
+          </p:cNvPr>
+          <p:cNvPicPr>
+            <a:picLocks noGrp="1" noChangeAspect="1"/>
+          </p:cNvPicPr>
+          <p:nvPr>
+            <p:ph idx="1"/>
+          </p:nvPr>
+        </p:nvPicPr>
+        <p:blipFill>
+          <a:blip r:embed="rId2">
+            <a:extLst>
+              <a:ext uri="{28A0092B-C50C-407E-A947-70E740481C1C}">
+                <a14:useLocalDpi xmlns:a14="http://schemas.microsoft.com/office/drawing/2010/main" val="0"/>
+              </a:ext>
+            </a:extLst>
+          </a:blip>
+          <a:stretch>
+            <a:fillRect/>
+          </a:stretch>
+        </p:blipFill>
+        <p:spPr>
+          <a:xfrm>
+            <a:off x="0" y="1859935"/>
+            <a:ext cx="9144000" cy="3138129"/>
+          </a:xfrm>
+        </p:spPr>
+      </p:pic>
       <p:sp>
         <p:nvSpPr>
-          <p:cNvPr id="3" name="Marcador de contenido 2">
+          <p:cNvPr id="6" name="CuadroTexto 5">
             <a:extLst>
               <a:ext uri="{FF2B5EF4-FFF2-40B4-BE49-F238E27FC236}">
-                <a16:creationId xmlns:a16="http://schemas.microsoft.com/office/drawing/2014/main" id="{4CC0AB18-FD2D-46FE-037D-E70A25A6B168}"/>
+                <a16:creationId xmlns:a16="http://schemas.microsoft.com/office/drawing/2014/main" id="{80055CED-A0DC-F09D-2615-49895DF964B6}"/>
+              </a:ext>
+            </a:extLst>
+          </p:cNvPr>
+          <p:cNvSpPr txBox="1"/>
+          <p:nvPr/>
+        </p:nvSpPr>
+        <p:spPr>
+          <a:xfrm>
+            <a:off x="1331640" y="5220207"/>
+            <a:ext cx="7560840" cy="1077218"/>
+          </a:xfrm>
+          <a:prstGeom prst="rect">
+            <a:avLst/>
+          </a:prstGeom>
+          <a:noFill/>
+        </p:spPr>
+        <p:txBody>
+          <a:bodyPr wrap="square" rtlCol="0">
+            <a:spAutoFit/>
+          </a:bodyPr>
+          <a:lstStyle/>
+          <a:p>
+            <a:pPr marL="285750" indent="-285750">
+              <a:buFont typeface="Arial" panose="020B0604020202020204" pitchFamily="34" charset="0"/>
+              <a:buChar char="•"/>
+            </a:pPr>
+            <a:r>
+              <a:rPr lang="es-ES" sz="1600" dirty="0"/>
+              <a:t>Los modelos lineales fueron más interpretables, pero menos flexibles.</a:t>
+            </a:r>
+          </a:p>
+          <a:p>
+            <a:pPr marL="285750" indent="-285750">
+              <a:buFont typeface="Arial" panose="020B0604020202020204" pitchFamily="34" charset="0"/>
+              <a:buChar char="•"/>
+            </a:pPr>
+            <a:r>
+              <a:rPr lang="es-ES" sz="1600" dirty="0"/>
+              <a:t>Los modelos de árboles captaron relaciones más complejas en los datos.</a:t>
+            </a:r>
+          </a:p>
+          <a:p>
+            <a:pPr marL="285750" indent="-285750">
+              <a:buFont typeface="Arial" panose="020B0604020202020204" pitchFamily="34" charset="0"/>
+              <a:buChar char="•"/>
+            </a:pPr>
+            <a:r>
+              <a:rPr lang="es-ES" sz="1600" dirty="0"/>
+              <a:t>El ensamble </a:t>
+            </a:r>
+            <a:r>
+              <a:rPr lang="es-ES" sz="1600" dirty="0" err="1"/>
+              <a:t>XGBoost</a:t>
+            </a:r>
+            <a:r>
+              <a:rPr lang="es-ES" sz="1600" dirty="0"/>
+              <a:t>–CART combinó ambos enfoques y logró el mejor equilibrio general.</a:t>
+            </a:r>
+            <a:endParaRPr lang="en-US" sz="1600" dirty="0"/>
+          </a:p>
+        </p:txBody>
+      </p:sp>
+    </p:spTree>
+    <p:extLst>
+      <p:ext uri="{BB962C8B-B14F-4D97-AF65-F5344CB8AC3E}">
+        <p14:creationId xmlns:p14="http://schemas.microsoft.com/office/powerpoint/2010/main" val="146639435"/>
+      </p:ext>
+    </p:extLst>
+  </p:cSld>
+  <p:clrMapOvr>
+    <a:masterClrMapping/>
+  </p:clrMapOvr>
+</p:sld>
+</file>
+
+<file path=ppt/slides/slide4.xml><?xml version="1.0" encoding="utf-8"?>
+<p:sld xmlns:a="http://schemas.openxmlformats.org/drawingml/2006/main" xmlns:r="http://schemas.openxmlformats.org/officeDocument/2006/relationships" xmlns:p="http://schemas.openxmlformats.org/presentationml/2006/main">
+  <p:cSld>
+    <p:spTree>
+      <p:nvGrpSpPr>
+        <p:cNvPr id="1" name=""/>
+        <p:cNvGrpSpPr/>
+        <p:nvPr/>
+      </p:nvGrpSpPr>
+      <p:grpSpPr>
+        <a:xfrm>
+          <a:off x="0" y="0"/>
+          <a:ext cx="0" cy="0"/>
+          <a:chOff x="0" y="0"/>
+          <a:chExt cx="0" cy="0"/>
+        </a:xfrm>
+      </p:grpSpPr>
+      <p:sp>
+        <p:nvSpPr>
+          <p:cNvPr id="2" name="Título 1">
+            <a:extLst>
+              <a:ext uri="{FF2B5EF4-FFF2-40B4-BE49-F238E27FC236}">
+                <a16:creationId xmlns:a16="http://schemas.microsoft.com/office/drawing/2014/main" id="{44845C44-F077-BDC7-EF53-5E1F10782C72}"/>
               </a:ext>
             </a:extLst>
           </p:cNvPr>
@@ -3787,22 +3940,1947 @@
             <a:spLocks noGrp="1"/>
           </p:cNvSpPr>
           <p:nvPr>
+            <p:ph type="title"/>
+          </p:nvPr>
+        </p:nvSpPr>
+        <p:spPr>
+          <a:xfrm>
+            <a:off x="4211960" y="764704"/>
+            <a:ext cx="8229600" cy="500062"/>
+          </a:xfrm>
+        </p:spPr>
+        <p:txBody>
+          <a:bodyPr/>
+          <a:lstStyle/>
+          <a:p>
+            <a:r>
+              <a:rPr lang="en-US" dirty="0" err="1"/>
+              <a:t>Resultados</a:t>
+            </a:r>
+            <a:r>
+              <a:rPr lang="en-US" dirty="0"/>
+              <a:t> Kaggle</a:t>
+            </a:r>
+          </a:p>
+        </p:txBody>
+      </p:sp>
+      <p:pic>
+        <p:nvPicPr>
+          <p:cNvPr id="8" name="Marcador de contenido 7">
+            <a:extLst>
+              <a:ext uri="{FF2B5EF4-FFF2-40B4-BE49-F238E27FC236}">
+                <a16:creationId xmlns:a16="http://schemas.microsoft.com/office/drawing/2014/main" id="{ADCDBDF1-A4CF-DB2E-C7AB-C6FAB1764D51}"/>
+              </a:ext>
+            </a:extLst>
+          </p:cNvPr>
+          <p:cNvPicPr>
+            <a:picLocks noGrp="1" noChangeAspect="1"/>
+          </p:cNvPicPr>
+          <p:nvPr>
+            <p:ph idx="1"/>
+          </p:nvPr>
+        </p:nvPicPr>
+        <p:blipFill>
+          <a:blip r:embed="rId2">
+            <a:extLst>
+              <a:ext uri="{28A0092B-C50C-407E-A947-70E740481C1C}">
+                <a14:useLocalDpi xmlns:a14="http://schemas.microsoft.com/office/drawing/2010/main" val="0"/>
+              </a:ext>
+            </a:extLst>
+          </a:blip>
+          <a:stretch>
+            <a:fillRect/>
+          </a:stretch>
+        </p:blipFill>
+        <p:spPr>
+          <a:xfrm>
+            <a:off x="572291" y="1416771"/>
+            <a:ext cx="7999418" cy="4479206"/>
+          </a:xfrm>
+        </p:spPr>
+      </p:pic>
+    </p:spTree>
+    <p:extLst>
+      <p:ext uri="{BB962C8B-B14F-4D97-AF65-F5344CB8AC3E}">
+        <p14:creationId xmlns:p14="http://schemas.microsoft.com/office/powerpoint/2010/main" val="113547467"/>
+      </p:ext>
+    </p:extLst>
+  </p:cSld>
+  <p:clrMapOvr>
+    <a:masterClrMapping/>
+  </p:clrMapOvr>
+</p:sld>
+</file>
+
+<file path=ppt/slides/slide5.xml><?xml version="1.0" encoding="utf-8"?>
+<p:sld xmlns:a="http://schemas.openxmlformats.org/drawingml/2006/main" xmlns:r="http://schemas.openxmlformats.org/officeDocument/2006/relationships" xmlns:p="http://schemas.openxmlformats.org/presentationml/2006/main">
+  <p:cSld>
+    <p:spTree>
+      <p:nvGrpSpPr>
+        <p:cNvPr id="1" name=""/>
+        <p:cNvGrpSpPr/>
+        <p:nvPr/>
+      </p:nvGrpSpPr>
+      <p:grpSpPr>
+        <a:xfrm>
+          <a:off x="0" y="0"/>
+          <a:ext cx="0" cy="0"/>
+          <a:chOff x="0" y="0"/>
+          <a:chExt cx="0" cy="0"/>
+        </a:xfrm>
+      </p:grpSpPr>
+      <p:sp>
+        <p:nvSpPr>
+          <p:cNvPr id="2" name="Título 1">
+            <a:extLst>
+              <a:ext uri="{FF2B5EF4-FFF2-40B4-BE49-F238E27FC236}">
+                <a16:creationId xmlns:a16="http://schemas.microsoft.com/office/drawing/2014/main" id="{50574A81-1D4C-C8F3-D336-FB679573537B}"/>
+              </a:ext>
+            </a:extLst>
+          </p:cNvPr>
+          <p:cNvSpPr>
+            <a:spLocks noGrp="1"/>
+          </p:cNvSpPr>
+          <p:nvPr>
+            <p:ph type="title"/>
+          </p:nvPr>
+        </p:nvSpPr>
+        <p:spPr>
+          <a:xfrm>
+            <a:off x="3419871" y="1556792"/>
+            <a:ext cx="2304256" cy="500062"/>
+          </a:xfrm>
+        </p:spPr>
+        <p:txBody>
+          <a:bodyPr/>
+          <a:lstStyle/>
+          <a:p>
+            <a:r>
+              <a:rPr lang="en-US" dirty="0" err="1"/>
+              <a:t>Limitaciones</a:t>
+            </a:r>
+            <a:endParaRPr lang="en-US" dirty="0"/>
+          </a:p>
+        </p:txBody>
+      </p:sp>
+      <p:pic>
+        <p:nvPicPr>
+          <p:cNvPr id="5" name="Marcador de contenido 4">
+            <a:extLst>
+              <a:ext uri="{FF2B5EF4-FFF2-40B4-BE49-F238E27FC236}">
+                <a16:creationId xmlns:a16="http://schemas.microsoft.com/office/drawing/2014/main" id="{7A162529-E8A0-F7DE-C118-B494E52D1DF4}"/>
+              </a:ext>
+            </a:extLst>
+          </p:cNvPr>
+          <p:cNvPicPr>
+            <a:picLocks noGrp="1" noChangeAspect="1"/>
+          </p:cNvPicPr>
+          <p:nvPr>
+            <p:ph idx="1"/>
+          </p:nvPr>
+        </p:nvPicPr>
+        <p:blipFill>
+          <a:blip r:embed="rId2">
+            <a:extLst>
+              <a:ext uri="{28A0092B-C50C-407E-A947-70E740481C1C}">
+                <a14:useLocalDpi xmlns:a14="http://schemas.microsoft.com/office/drawing/2010/main" val="0"/>
+              </a:ext>
+            </a:extLst>
+          </a:blip>
+          <a:stretch>
+            <a:fillRect/>
+          </a:stretch>
+        </p:blipFill>
+        <p:spPr>
+          <a:xfrm>
+            <a:off x="32012" y="2420888"/>
+            <a:ext cx="9079975" cy="2675577"/>
+          </a:xfrm>
+        </p:spPr>
+      </p:pic>
+    </p:spTree>
+    <p:extLst>
+      <p:ext uri="{BB962C8B-B14F-4D97-AF65-F5344CB8AC3E}">
+        <p14:creationId xmlns:p14="http://schemas.microsoft.com/office/powerpoint/2010/main" val="4004539996"/>
+      </p:ext>
+    </p:extLst>
+  </p:cSld>
+  <p:clrMapOvr>
+    <a:masterClrMapping/>
+  </p:clrMapOvr>
+</p:sld>
+</file>
+
+<file path=ppt/slides/slide6.xml><?xml version="1.0" encoding="utf-8"?>
+<p:sld xmlns:a="http://schemas.openxmlformats.org/drawingml/2006/main" xmlns:r="http://schemas.openxmlformats.org/officeDocument/2006/relationships" xmlns:p="http://schemas.openxmlformats.org/presentationml/2006/main">
+  <p:cSld>
+    <p:spTree>
+      <p:nvGrpSpPr>
+        <p:cNvPr id="1" name=""/>
+        <p:cNvGrpSpPr/>
+        <p:nvPr/>
+      </p:nvGrpSpPr>
+      <p:grpSpPr>
+        <a:xfrm>
+          <a:off x="0" y="0"/>
+          <a:ext cx="0" cy="0"/>
+          <a:chOff x="0" y="0"/>
+          <a:chExt cx="0" cy="0"/>
+        </a:xfrm>
+      </p:grpSpPr>
+      <p:sp>
+        <p:nvSpPr>
+          <p:cNvPr id="2" name="Título 1">
+            <a:extLst>
+              <a:ext uri="{FF2B5EF4-FFF2-40B4-BE49-F238E27FC236}">
+                <a16:creationId xmlns:a16="http://schemas.microsoft.com/office/drawing/2014/main" id="{C8BFC296-050B-A68E-AB61-FC2D6415923A}"/>
+              </a:ext>
+            </a:extLst>
+          </p:cNvPr>
+          <p:cNvSpPr>
+            <a:spLocks noGrp="1"/>
+          </p:cNvSpPr>
+          <p:nvPr>
+            <p:ph type="title"/>
+          </p:nvPr>
+        </p:nvSpPr>
+        <p:spPr>
+          <a:xfrm>
+            <a:off x="1237605" y="1772816"/>
+            <a:ext cx="6668789" cy="500062"/>
+          </a:xfrm>
+        </p:spPr>
+        <p:txBody>
+          <a:bodyPr/>
+          <a:lstStyle/>
+          <a:p>
+            <a:r>
+              <a:rPr lang="es-ES" dirty="0"/>
+              <a:t>Por qué </a:t>
+            </a:r>
+            <a:r>
+              <a:rPr lang="es-ES" dirty="0" err="1"/>
+              <a:t>XGBoost</a:t>
+            </a:r>
+            <a:r>
+              <a:rPr lang="es-ES" dirty="0"/>
+              <a:t>-CART superó a los demás</a:t>
+            </a:r>
+            <a:endParaRPr lang="en-US" dirty="0"/>
+          </a:p>
+        </p:txBody>
+      </p:sp>
+      <p:sp>
+        <p:nvSpPr>
+          <p:cNvPr id="4" name="Rectangle 1">
+            <a:extLst>
+              <a:ext uri="{FF2B5EF4-FFF2-40B4-BE49-F238E27FC236}">
+                <a16:creationId xmlns:a16="http://schemas.microsoft.com/office/drawing/2014/main" id="{F552EFED-81CE-8BB1-8B3B-9CB64CD71427}"/>
+              </a:ext>
+            </a:extLst>
+          </p:cNvPr>
+          <p:cNvSpPr>
+            <a:spLocks noGrp="1" noChangeArrowheads="1"/>
+          </p:cNvSpPr>
+          <p:nvPr>
             <p:ph idx="1"/>
           </p:nvPr>
         </p:nvSpPr>
-        <p:spPr/>
+        <p:spPr bwMode="auto">
+          <a:xfrm>
+            <a:off x="827584" y="2513802"/>
+            <a:ext cx="8229600" cy="3293209"/>
+          </a:xfrm>
+          <a:prstGeom prst="rect">
+            <a:avLst/>
+          </a:prstGeom>
+          <a:noFill/>
+          <a:ln>
+            <a:noFill/>
+          </a:ln>
+          <a:effectLst/>
+          <a:extLst>
+            <a:ext uri="{909E8E84-426E-40DD-AFC4-6F175D3DCCD1}">
+              <a14:hiddenFill xmlns:a14="http://schemas.microsoft.com/office/drawing/2010/main">
+                <a:solidFill>
+                  <a:schemeClr val="accent1"/>
+                </a:solidFill>
+              </a14:hiddenFill>
+            </a:ext>
+            <a:ext uri="{91240B29-F687-4F45-9708-019B960494DF}">
+              <a14:hiddenLine xmlns:a14="http://schemas.microsoft.com/office/drawing/2010/main" w="9525">
+                <a:solidFill>
+                  <a:schemeClr val="tx1"/>
+                </a:solidFill>
+                <a:miter lim="800000"/>
+                <a:headEnd/>
+                <a:tailEnd/>
+              </a14:hiddenLine>
+            </a:ext>
+            <a:ext uri="{AF507438-7753-43E0-B8FC-AC1667EBCBE1}">
+              <a14:hiddenEffects xmlns:a14="http://schemas.microsoft.com/office/drawing/2010/main">
+                <a:effectLst>
+                  <a:outerShdw dist="35921" dir="2700000" algn="ctr" rotWithShape="0">
+                    <a:schemeClr val="bg2"/>
+                  </a:outerShdw>
+                </a:effectLst>
+              </a14:hiddenEffects>
+            </a:ext>
+          </a:extLst>
+        </p:spPr>
         <p:txBody>
-          <a:bodyPr/>
+          <a:bodyPr vert="horz" wrap="square" lIns="91440" tIns="45720" rIns="91440" bIns="45720" numCol="1" anchor="ctr" anchorCtr="0" compatLnSpc="1">
+            <a:prstTxWarp prst="textNoShape">
+              <a:avLst/>
+            </a:prstTxWarp>
+            <a:spAutoFit/>
+          </a:bodyPr>
           <a:lstStyle/>
           <a:p>
-            <a:endParaRPr lang="en-US"/>
+            <a:pPr marL="0" marR="0" lvl="0" indent="0" algn="l" defTabSz="914400" rtl="0" eaLnBrk="0" fontAlgn="base" latinLnBrk="0" hangingPunct="0">
+              <a:lnSpc>
+                <a:spcPct val="100000"/>
+              </a:lnSpc>
+              <a:spcBef>
+                <a:spcPct val="0"/>
+              </a:spcBef>
+              <a:spcAft>
+                <a:spcPct val="0"/>
+              </a:spcAft>
+              <a:buClrTx/>
+              <a:buSzTx/>
+              <a:buFontTx/>
+              <a:buChar char="•"/>
+              <a:tabLst/>
+            </a:pPr>
+            <a:r>
+              <a:rPr kumimoji="0" lang="en-US" altLang="en-US" sz="1600" i="0" u="none" strike="noStrike" cap="none" normalizeH="0" baseline="0" dirty="0">
+                <a:ln>
+                  <a:noFill/>
+                </a:ln>
+                <a:solidFill>
+                  <a:schemeClr val="tx1"/>
+                </a:solidFill>
+                <a:effectLst/>
+                <a:latin typeface="Arial" panose="020B0604020202020204" pitchFamily="34" charset="0"/>
+              </a:rPr>
+              <a:t>El </a:t>
+            </a:r>
+            <a:r>
+              <a:rPr kumimoji="0" lang="en-US" altLang="en-US" sz="1600" i="0" u="none" strike="noStrike" cap="none" normalizeH="0" baseline="0" dirty="0" err="1">
+                <a:ln>
+                  <a:noFill/>
+                </a:ln>
+                <a:solidFill>
+                  <a:schemeClr val="tx1"/>
+                </a:solidFill>
+                <a:effectLst/>
+                <a:latin typeface="Arial" panose="020B0604020202020204" pitchFamily="34" charset="0"/>
+              </a:rPr>
+              <a:t>ensamble</a:t>
+            </a:r>
+            <a:r>
+              <a:rPr kumimoji="0" lang="en-US" altLang="en-US" sz="1600" i="0" u="none" strike="noStrike" cap="none" normalizeH="0" baseline="0" dirty="0">
+                <a:ln>
+                  <a:noFill/>
+                </a:ln>
+                <a:solidFill>
+                  <a:schemeClr val="tx1"/>
+                </a:solidFill>
+                <a:effectLst/>
+                <a:latin typeface="Arial" panose="020B0604020202020204" pitchFamily="34" charset="0"/>
+              </a:rPr>
+              <a:t> </a:t>
+            </a:r>
+            <a:r>
+              <a:rPr kumimoji="0" lang="en-US" altLang="en-US" sz="1600" i="0" u="none" strike="noStrike" cap="none" normalizeH="0" baseline="0" dirty="0" err="1">
+                <a:ln>
+                  <a:noFill/>
+                </a:ln>
+                <a:solidFill>
+                  <a:schemeClr val="tx1"/>
+                </a:solidFill>
+                <a:effectLst/>
+                <a:latin typeface="Arial" panose="020B0604020202020204" pitchFamily="34" charset="0"/>
+              </a:rPr>
+              <a:t>XGBoost</a:t>
+            </a:r>
+            <a:r>
+              <a:rPr kumimoji="0" lang="en-US" altLang="en-US" sz="1600" i="0" u="none" strike="noStrike" cap="none" normalizeH="0" baseline="0" dirty="0">
+                <a:ln>
+                  <a:noFill/>
+                </a:ln>
+                <a:solidFill>
+                  <a:schemeClr val="tx1"/>
+                </a:solidFill>
+                <a:effectLst/>
+                <a:latin typeface="Arial" panose="020B0604020202020204" pitchFamily="34" charset="0"/>
+              </a:rPr>
+              <a:t>–CART </a:t>
+            </a:r>
+            <a:r>
+              <a:rPr kumimoji="0" lang="en-US" altLang="en-US" sz="1600" i="0" u="none" strike="noStrike" cap="none" normalizeH="0" baseline="0" dirty="0" err="1">
+                <a:ln>
+                  <a:noFill/>
+                </a:ln>
+                <a:solidFill>
+                  <a:schemeClr val="tx1"/>
+                </a:solidFill>
+                <a:effectLst/>
+                <a:latin typeface="Arial" panose="020B0604020202020204" pitchFamily="34" charset="0"/>
+              </a:rPr>
+              <a:t>combinó</a:t>
+            </a:r>
+            <a:r>
+              <a:rPr kumimoji="0" lang="en-US" altLang="en-US" sz="1600" i="0" u="none" strike="noStrike" cap="none" normalizeH="0" baseline="0" dirty="0">
+                <a:ln>
+                  <a:noFill/>
+                </a:ln>
+                <a:solidFill>
+                  <a:schemeClr val="tx1"/>
+                </a:solidFill>
+                <a:effectLst/>
+                <a:latin typeface="Arial" panose="020B0604020202020204" pitchFamily="34" charset="0"/>
+              </a:rPr>
+              <a:t> la </a:t>
+            </a:r>
+            <a:r>
+              <a:rPr kumimoji="0" lang="en-US" altLang="en-US" sz="1600" i="0" u="none" strike="noStrike" cap="none" normalizeH="0" baseline="0" dirty="0" err="1">
+                <a:ln>
+                  <a:noFill/>
+                </a:ln>
+                <a:solidFill>
+                  <a:schemeClr val="tx1"/>
+                </a:solidFill>
+                <a:effectLst/>
+                <a:latin typeface="Arial" panose="020B0604020202020204" pitchFamily="34" charset="0"/>
+              </a:rPr>
+              <a:t>interpretabilidad</a:t>
+            </a:r>
+            <a:r>
+              <a:rPr kumimoji="0" lang="en-US" altLang="en-US" sz="1600" i="0" u="none" strike="noStrike" cap="none" normalizeH="0" baseline="0" dirty="0">
+                <a:ln>
+                  <a:noFill/>
+                </a:ln>
+                <a:solidFill>
+                  <a:schemeClr val="tx1"/>
+                </a:solidFill>
+                <a:effectLst/>
+                <a:latin typeface="Arial" panose="020B0604020202020204" pitchFamily="34" charset="0"/>
+              </a:rPr>
+              <a:t> del árbol, con la </a:t>
+            </a:r>
+            <a:r>
+              <a:rPr kumimoji="0" lang="en-US" altLang="en-US" sz="1600" i="0" u="none" strike="noStrike" cap="none" normalizeH="0" baseline="0" dirty="0" err="1">
+                <a:ln>
+                  <a:noFill/>
+                </a:ln>
+                <a:solidFill>
+                  <a:schemeClr val="tx1"/>
+                </a:solidFill>
+                <a:effectLst/>
+                <a:latin typeface="Arial" panose="020B0604020202020204" pitchFamily="34" charset="0"/>
+              </a:rPr>
+              <a:t>capacidad</a:t>
+            </a:r>
+            <a:r>
+              <a:rPr kumimoji="0" lang="en-US" altLang="en-US" sz="1600" i="0" u="none" strike="noStrike" cap="none" normalizeH="0" baseline="0" dirty="0">
+                <a:ln>
+                  <a:noFill/>
+                </a:ln>
+                <a:solidFill>
+                  <a:schemeClr val="tx1"/>
+                </a:solidFill>
+                <a:effectLst/>
+                <a:latin typeface="Arial" panose="020B0604020202020204" pitchFamily="34" charset="0"/>
+              </a:rPr>
+              <a:t> </a:t>
+            </a:r>
+            <a:r>
+              <a:rPr kumimoji="0" lang="en-US" altLang="en-US" sz="1600" i="0" u="none" strike="noStrike" cap="none" normalizeH="0" baseline="0" dirty="0" err="1">
+                <a:ln>
+                  <a:noFill/>
+                </a:ln>
+                <a:solidFill>
+                  <a:schemeClr val="tx1"/>
+                </a:solidFill>
+                <a:effectLst/>
+                <a:latin typeface="Arial" panose="020B0604020202020204" pitchFamily="34" charset="0"/>
+              </a:rPr>
+              <a:t>predictiva</a:t>
+            </a:r>
+            <a:r>
+              <a:rPr kumimoji="0" lang="en-US" altLang="en-US" sz="1600" i="0" u="none" strike="noStrike" cap="none" normalizeH="0" baseline="0" dirty="0">
+                <a:ln>
+                  <a:noFill/>
+                </a:ln>
+                <a:solidFill>
+                  <a:schemeClr val="tx1"/>
+                </a:solidFill>
+                <a:effectLst/>
+                <a:latin typeface="Arial" panose="020B0604020202020204" pitchFamily="34" charset="0"/>
+              </a:rPr>
+              <a:t> del boosting.</a:t>
+            </a:r>
+          </a:p>
+          <a:p>
+            <a:pPr marL="0" marR="0" lvl="0" indent="0" algn="l" defTabSz="914400" rtl="0" eaLnBrk="0" fontAlgn="base" latinLnBrk="0" hangingPunct="0">
+              <a:lnSpc>
+                <a:spcPct val="100000"/>
+              </a:lnSpc>
+              <a:spcBef>
+                <a:spcPct val="0"/>
+              </a:spcBef>
+              <a:spcAft>
+                <a:spcPct val="0"/>
+              </a:spcAft>
+              <a:buClrTx/>
+              <a:buSzTx/>
+              <a:buFontTx/>
+              <a:buChar char="•"/>
+              <a:tabLst/>
+            </a:pPr>
+            <a:r>
+              <a:rPr kumimoji="0" lang="en-US" altLang="en-US" sz="1600" i="0" u="none" strike="noStrike" cap="none" normalizeH="0" baseline="0" dirty="0" err="1">
+                <a:ln>
+                  <a:noFill/>
+                </a:ln>
+                <a:solidFill>
+                  <a:schemeClr val="tx1"/>
+                </a:solidFill>
+                <a:effectLst/>
+                <a:latin typeface="Arial" panose="020B0604020202020204" pitchFamily="34" charset="0"/>
+              </a:rPr>
+              <a:t>XGBoost</a:t>
+            </a:r>
+            <a:r>
+              <a:rPr kumimoji="0" lang="en-US" altLang="en-US" sz="1600" i="0" u="none" strike="noStrike" cap="none" normalizeH="0" baseline="0" dirty="0">
+                <a:ln>
+                  <a:noFill/>
+                </a:ln>
+                <a:solidFill>
+                  <a:schemeClr val="tx1"/>
+                </a:solidFill>
+                <a:effectLst/>
+                <a:latin typeface="Arial" panose="020B0604020202020204" pitchFamily="34" charset="0"/>
+              </a:rPr>
+              <a:t> </a:t>
+            </a:r>
+            <a:r>
+              <a:rPr kumimoji="0" lang="en-US" altLang="en-US" sz="1600" i="0" u="none" strike="noStrike" cap="none" normalizeH="0" baseline="0" dirty="0" err="1">
+                <a:ln>
+                  <a:noFill/>
+                </a:ln>
+                <a:solidFill>
+                  <a:schemeClr val="tx1"/>
+                </a:solidFill>
+                <a:effectLst/>
+                <a:latin typeface="Arial" panose="020B0604020202020204" pitchFamily="34" charset="0"/>
+              </a:rPr>
+              <a:t>aprende</a:t>
+            </a:r>
+            <a:r>
+              <a:rPr kumimoji="0" lang="en-US" altLang="en-US" sz="1600" i="0" u="none" strike="noStrike" cap="none" normalizeH="0" baseline="0" dirty="0">
+                <a:ln>
+                  <a:noFill/>
+                </a:ln>
+                <a:solidFill>
+                  <a:schemeClr val="tx1"/>
+                </a:solidFill>
+                <a:effectLst/>
+                <a:latin typeface="Arial" panose="020B0604020202020204" pitchFamily="34" charset="0"/>
+              </a:rPr>
+              <a:t> </a:t>
+            </a:r>
+            <a:r>
+              <a:rPr kumimoji="0" lang="en-US" altLang="en-US" sz="1600" i="0" u="none" strike="noStrike" cap="none" normalizeH="0" baseline="0" dirty="0" err="1">
+                <a:ln>
+                  <a:noFill/>
+                </a:ln>
+                <a:solidFill>
+                  <a:schemeClr val="tx1"/>
+                </a:solidFill>
+                <a:effectLst/>
+                <a:latin typeface="Arial" panose="020B0604020202020204" pitchFamily="34" charset="0"/>
+              </a:rPr>
+              <a:t>iterativamente</a:t>
+            </a:r>
+            <a:r>
+              <a:rPr kumimoji="0" lang="en-US" altLang="en-US" sz="1600" i="0" u="none" strike="noStrike" cap="none" normalizeH="0" baseline="0" dirty="0">
+                <a:ln>
+                  <a:noFill/>
+                </a:ln>
+                <a:solidFill>
+                  <a:schemeClr val="tx1"/>
+                </a:solidFill>
+                <a:effectLst/>
+                <a:latin typeface="Arial" panose="020B0604020202020204" pitchFamily="34" charset="0"/>
+              </a:rPr>
+              <a:t> de sus </a:t>
+            </a:r>
+            <a:r>
+              <a:rPr kumimoji="0" lang="en-US" altLang="en-US" sz="1600" i="0" u="none" strike="noStrike" cap="none" normalizeH="0" baseline="0" dirty="0" err="1">
+                <a:ln>
+                  <a:noFill/>
+                </a:ln>
+                <a:solidFill>
+                  <a:schemeClr val="tx1"/>
+                </a:solidFill>
+                <a:effectLst/>
+                <a:latin typeface="Arial" panose="020B0604020202020204" pitchFamily="34" charset="0"/>
+              </a:rPr>
+              <a:t>errores</a:t>
+            </a:r>
+            <a:r>
+              <a:rPr kumimoji="0" lang="en-US" altLang="en-US" sz="1600" i="0" u="none" strike="noStrike" cap="none" normalizeH="0" baseline="0" dirty="0">
+                <a:ln>
+                  <a:noFill/>
+                </a:ln>
+                <a:solidFill>
+                  <a:schemeClr val="tx1"/>
+                </a:solidFill>
+                <a:effectLst/>
+                <a:latin typeface="Arial" panose="020B0604020202020204" pitchFamily="34" charset="0"/>
+              </a:rPr>
+              <a:t>, </a:t>
+            </a:r>
+            <a:r>
+              <a:rPr kumimoji="0" lang="en-US" altLang="en-US" sz="1600" i="0" u="none" strike="noStrike" cap="none" normalizeH="0" baseline="0" dirty="0" err="1">
+                <a:ln>
+                  <a:noFill/>
+                </a:ln>
+                <a:solidFill>
+                  <a:schemeClr val="tx1"/>
+                </a:solidFill>
+                <a:effectLst/>
+                <a:latin typeface="Arial" panose="020B0604020202020204" pitchFamily="34" charset="0"/>
+              </a:rPr>
+              <a:t>esto</a:t>
+            </a:r>
+            <a:r>
+              <a:rPr kumimoji="0" lang="en-US" altLang="en-US" sz="1600" i="0" u="none" strike="noStrike" cap="none" normalizeH="0" baseline="0" dirty="0">
+                <a:ln>
+                  <a:noFill/>
+                </a:ln>
+                <a:solidFill>
+                  <a:schemeClr val="tx1"/>
+                </a:solidFill>
+                <a:effectLst/>
+                <a:latin typeface="Arial" panose="020B0604020202020204" pitchFamily="34" charset="0"/>
+              </a:rPr>
+              <a:t> </a:t>
+            </a:r>
+            <a:r>
+              <a:rPr kumimoji="0" lang="en-US" altLang="en-US" sz="1600" i="0" u="none" strike="noStrike" cap="none" normalizeH="0" baseline="0" dirty="0" err="1">
+                <a:ln>
+                  <a:noFill/>
+                </a:ln>
+                <a:solidFill>
+                  <a:schemeClr val="tx1"/>
+                </a:solidFill>
+                <a:effectLst/>
+                <a:latin typeface="Arial" panose="020B0604020202020204" pitchFamily="34" charset="0"/>
+              </a:rPr>
+              <a:t>resulta</a:t>
+            </a:r>
+            <a:r>
+              <a:rPr kumimoji="0" lang="en-US" altLang="en-US" sz="1600" i="0" u="none" strike="noStrike" cap="none" normalizeH="0" baseline="0" dirty="0">
+                <a:ln>
+                  <a:noFill/>
+                </a:ln>
+                <a:solidFill>
+                  <a:schemeClr val="tx1"/>
+                </a:solidFill>
+                <a:effectLst/>
+                <a:latin typeface="Arial" panose="020B0604020202020204" pitchFamily="34" charset="0"/>
+              </a:rPr>
+              <a:t> </a:t>
+            </a:r>
+            <a:r>
+              <a:rPr kumimoji="0" lang="en-US" altLang="en-US" sz="1600" i="0" u="none" strike="noStrike" cap="none" normalizeH="0" baseline="0" dirty="0" err="1">
+                <a:ln>
+                  <a:noFill/>
+                </a:ln>
+                <a:solidFill>
+                  <a:schemeClr val="tx1"/>
+                </a:solidFill>
+                <a:effectLst/>
+                <a:latin typeface="Arial" panose="020B0604020202020204" pitchFamily="34" charset="0"/>
+              </a:rPr>
+              <a:t>en</a:t>
+            </a:r>
+            <a:r>
+              <a:rPr kumimoji="0" lang="en-US" altLang="en-US" sz="1600" i="0" u="none" strike="noStrike" cap="none" normalizeH="0" baseline="0" dirty="0">
+                <a:ln>
+                  <a:noFill/>
+                </a:ln>
+                <a:solidFill>
+                  <a:schemeClr val="tx1"/>
+                </a:solidFill>
+                <a:effectLst/>
+                <a:latin typeface="Arial" panose="020B0604020202020204" pitchFamily="34" charset="0"/>
+              </a:rPr>
+              <a:t> </a:t>
+            </a:r>
+            <a:r>
+              <a:rPr kumimoji="0" lang="en-US" altLang="en-US" sz="1600" i="0" u="none" strike="noStrike" cap="none" normalizeH="0" baseline="0" dirty="0" err="1">
+                <a:ln>
+                  <a:noFill/>
+                </a:ln>
+                <a:solidFill>
+                  <a:schemeClr val="tx1"/>
+                </a:solidFill>
+                <a:effectLst/>
+                <a:latin typeface="Arial" panose="020B0604020202020204" pitchFamily="34" charset="0"/>
+              </a:rPr>
+              <a:t>reducciones</a:t>
+            </a:r>
+            <a:r>
+              <a:rPr kumimoji="0" lang="en-US" altLang="en-US" sz="1600" i="0" u="none" strike="noStrike" cap="none" normalizeH="0" baseline="0" dirty="0">
+                <a:ln>
+                  <a:noFill/>
+                </a:ln>
+                <a:solidFill>
+                  <a:schemeClr val="tx1"/>
+                </a:solidFill>
+                <a:effectLst/>
+                <a:latin typeface="Arial" panose="020B0604020202020204" pitchFamily="34" charset="0"/>
+              </a:rPr>
+              <a:t> </a:t>
+            </a:r>
+            <a:r>
+              <a:rPr kumimoji="0" lang="en-US" altLang="en-US" sz="1600" i="0" u="none" strike="noStrike" cap="none" normalizeH="0" baseline="0" dirty="0" err="1">
+                <a:ln>
+                  <a:noFill/>
+                </a:ln>
+                <a:solidFill>
+                  <a:schemeClr val="tx1"/>
+                </a:solidFill>
+                <a:effectLst/>
+                <a:latin typeface="Arial" panose="020B0604020202020204" pitchFamily="34" charset="0"/>
+              </a:rPr>
+              <a:t>en</a:t>
+            </a:r>
+            <a:r>
+              <a:rPr kumimoji="0" lang="en-US" altLang="en-US" sz="1600" i="0" u="none" strike="noStrike" cap="none" normalizeH="0" baseline="0" dirty="0">
+                <a:ln>
+                  <a:noFill/>
+                </a:ln>
+                <a:solidFill>
+                  <a:schemeClr val="tx1"/>
+                </a:solidFill>
+                <a:effectLst/>
+                <a:latin typeface="Arial" panose="020B0604020202020204" pitchFamily="34" charset="0"/>
+              </a:rPr>
+              <a:t> </a:t>
+            </a:r>
+            <a:r>
+              <a:rPr kumimoji="0" lang="en-US" altLang="en-US" sz="1600" i="0" u="none" strike="noStrike" cap="none" normalizeH="0" baseline="0" dirty="0" err="1">
+                <a:ln>
+                  <a:noFill/>
+                </a:ln>
+                <a:solidFill>
+                  <a:schemeClr val="tx1"/>
+                </a:solidFill>
+                <a:effectLst/>
+                <a:latin typeface="Arial" panose="020B0604020202020204" pitchFamily="34" charset="0"/>
+              </a:rPr>
+              <a:t>el</a:t>
+            </a:r>
+            <a:r>
+              <a:rPr kumimoji="0" lang="en-US" altLang="en-US" sz="1600" i="0" u="none" strike="noStrike" cap="none" normalizeH="0" baseline="0" dirty="0">
+                <a:ln>
+                  <a:noFill/>
+                </a:ln>
+                <a:solidFill>
+                  <a:schemeClr val="tx1"/>
+                </a:solidFill>
+                <a:effectLst/>
+                <a:latin typeface="Arial" panose="020B0604020202020204" pitchFamily="34" charset="0"/>
+              </a:rPr>
+              <a:t> </a:t>
+            </a:r>
+            <a:r>
+              <a:rPr kumimoji="0" lang="en-US" altLang="en-US" sz="1600" i="0" u="none" strike="noStrike" cap="none" normalizeH="0" baseline="0" dirty="0" err="1">
+                <a:ln>
+                  <a:noFill/>
+                </a:ln>
+                <a:solidFill>
+                  <a:schemeClr val="tx1"/>
+                </a:solidFill>
+                <a:effectLst/>
+                <a:latin typeface="Arial" panose="020B0604020202020204" pitchFamily="34" charset="0"/>
+              </a:rPr>
+              <a:t>sesgo</a:t>
+            </a:r>
+            <a:r>
+              <a:rPr kumimoji="0" lang="en-US" altLang="en-US" sz="1600" i="0" u="none" strike="noStrike" cap="none" normalizeH="0" baseline="0" dirty="0">
+                <a:ln>
+                  <a:noFill/>
+                </a:ln>
+                <a:solidFill>
+                  <a:schemeClr val="tx1"/>
+                </a:solidFill>
+                <a:effectLst/>
+                <a:latin typeface="Arial" panose="020B0604020202020204" pitchFamily="34" charset="0"/>
+              </a:rPr>
+              <a:t>.</a:t>
+            </a:r>
+          </a:p>
+          <a:p>
+            <a:pPr marL="0" marR="0" lvl="0" indent="0" algn="l" defTabSz="914400" rtl="0" eaLnBrk="0" fontAlgn="base" latinLnBrk="0" hangingPunct="0">
+              <a:lnSpc>
+                <a:spcPct val="100000"/>
+              </a:lnSpc>
+              <a:spcBef>
+                <a:spcPct val="0"/>
+              </a:spcBef>
+              <a:spcAft>
+                <a:spcPct val="0"/>
+              </a:spcAft>
+              <a:buClrTx/>
+              <a:buSzTx/>
+              <a:buFontTx/>
+              <a:buChar char="•"/>
+              <a:tabLst/>
+            </a:pPr>
+            <a:r>
+              <a:rPr kumimoji="0" lang="en-US" altLang="en-US" sz="1600" i="0" u="none" strike="noStrike" cap="none" normalizeH="0" baseline="0" dirty="0">
+                <a:ln>
+                  <a:noFill/>
+                </a:ln>
+                <a:solidFill>
+                  <a:schemeClr val="tx1"/>
+                </a:solidFill>
+                <a:effectLst/>
+                <a:latin typeface="Arial" panose="020B0604020202020204" pitchFamily="34" charset="0"/>
+              </a:rPr>
+              <a:t>CART reduce la </a:t>
+            </a:r>
+            <a:r>
+              <a:rPr kumimoji="0" lang="en-US" altLang="en-US" sz="1600" i="0" u="none" strike="noStrike" cap="none" normalizeH="0" baseline="0" dirty="0" err="1">
+                <a:ln>
+                  <a:noFill/>
+                </a:ln>
+                <a:solidFill>
+                  <a:schemeClr val="tx1"/>
+                </a:solidFill>
+                <a:effectLst/>
+                <a:latin typeface="Arial" panose="020B0604020202020204" pitchFamily="34" charset="0"/>
+              </a:rPr>
+              <a:t>varianza</a:t>
+            </a:r>
+            <a:r>
+              <a:rPr kumimoji="0" lang="en-US" altLang="en-US" sz="1600" i="0" u="none" strike="noStrike" cap="none" normalizeH="0" baseline="0" dirty="0">
+                <a:ln>
+                  <a:noFill/>
+                </a:ln>
+                <a:solidFill>
+                  <a:schemeClr val="tx1"/>
+                </a:solidFill>
+                <a:effectLst/>
+                <a:latin typeface="Arial" panose="020B0604020202020204" pitchFamily="34" charset="0"/>
+              </a:rPr>
+              <a:t>.</a:t>
+            </a:r>
+          </a:p>
+          <a:p>
+            <a:pPr marL="0" marR="0" lvl="0" indent="0" algn="l" defTabSz="914400" rtl="0" eaLnBrk="0" fontAlgn="base" latinLnBrk="0" hangingPunct="0">
+              <a:lnSpc>
+                <a:spcPct val="100000"/>
+              </a:lnSpc>
+              <a:spcBef>
+                <a:spcPct val="0"/>
+              </a:spcBef>
+              <a:spcAft>
+                <a:spcPct val="0"/>
+              </a:spcAft>
+              <a:buClrTx/>
+              <a:buSzTx/>
+              <a:buFontTx/>
+              <a:buChar char="•"/>
+              <a:tabLst/>
+            </a:pPr>
+            <a:r>
+              <a:rPr kumimoji="0" lang="en-US" altLang="en-US" sz="1600" i="0" u="none" strike="noStrike" cap="none" normalizeH="0" baseline="0" dirty="0">
+                <a:ln>
+                  <a:noFill/>
+                </a:ln>
+                <a:solidFill>
+                  <a:schemeClr val="tx1"/>
+                </a:solidFill>
+                <a:effectLst/>
+                <a:latin typeface="Arial" panose="020B0604020202020204" pitchFamily="34" charset="0"/>
+              </a:rPr>
+              <a:t>La </a:t>
+            </a:r>
+            <a:r>
+              <a:rPr kumimoji="0" lang="en-US" altLang="en-US" sz="1600" i="0" u="none" strike="noStrike" cap="none" normalizeH="0" baseline="0" dirty="0" err="1">
+                <a:ln>
+                  <a:noFill/>
+                </a:ln>
+                <a:solidFill>
+                  <a:schemeClr val="tx1"/>
+                </a:solidFill>
+                <a:effectLst/>
+                <a:latin typeface="Arial" panose="020B0604020202020204" pitchFamily="34" charset="0"/>
+              </a:rPr>
+              <a:t>ponderación</a:t>
+            </a:r>
+            <a:r>
+              <a:rPr kumimoji="0" lang="en-US" altLang="en-US" sz="1600" i="0" u="none" strike="noStrike" cap="none" normalizeH="0" baseline="0" dirty="0">
+                <a:ln>
+                  <a:noFill/>
+                </a:ln>
+                <a:solidFill>
+                  <a:schemeClr val="tx1"/>
+                </a:solidFill>
+                <a:effectLst/>
+                <a:latin typeface="Arial" panose="020B0604020202020204" pitchFamily="34" charset="0"/>
+              </a:rPr>
+              <a:t> (90% </a:t>
+            </a:r>
+            <a:r>
+              <a:rPr kumimoji="0" lang="en-US" altLang="en-US" sz="1600" i="0" u="none" strike="noStrike" cap="none" normalizeH="0" baseline="0" dirty="0" err="1">
+                <a:ln>
+                  <a:noFill/>
+                </a:ln>
+                <a:solidFill>
+                  <a:schemeClr val="tx1"/>
+                </a:solidFill>
+                <a:effectLst/>
+                <a:latin typeface="Arial" panose="020B0604020202020204" pitchFamily="34" charset="0"/>
+              </a:rPr>
+              <a:t>XGBoost</a:t>
+            </a:r>
+            <a:r>
+              <a:rPr kumimoji="0" lang="en-US" altLang="en-US" sz="1600" i="0" u="none" strike="noStrike" cap="none" normalizeH="0" baseline="0" dirty="0">
+                <a:ln>
+                  <a:noFill/>
+                </a:ln>
+                <a:solidFill>
+                  <a:schemeClr val="tx1"/>
+                </a:solidFill>
+                <a:effectLst/>
+                <a:latin typeface="Arial" panose="020B0604020202020204" pitchFamily="34" charset="0"/>
+              </a:rPr>
+              <a:t>, 10% CART) </a:t>
+            </a:r>
+            <a:r>
+              <a:rPr kumimoji="0" lang="en-US" altLang="en-US" sz="1600" i="0" u="none" strike="noStrike" cap="none" normalizeH="0" baseline="0" dirty="0" err="1">
+                <a:ln>
+                  <a:noFill/>
+                </a:ln>
+                <a:solidFill>
+                  <a:schemeClr val="tx1"/>
+                </a:solidFill>
+                <a:effectLst/>
+                <a:latin typeface="Arial" panose="020B0604020202020204" pitchFamily="34" charset="0"/>
+              </a:rPr>
+              <a:t>logró</a:t>
+            </a:r>
+            <a:r>
+              <a:rPr kumimoji="0" lang="en-US" altLang="en-US" sz="1600" i="0" u="none" strike="noStrike" cap="none" normalizeH="0" baseline="0" dirty="0">
+                <a:ln>
+                  <a:noFill/>
+                </a:ln>
+                <a:solidFill>
+                  <a:schemeClr val="tx1"/>
+                </a:solidFill>
+                <a:effectLst/>
+                <a:latin typeface="Arial" panose="020B0604020202020204" pitchFamily="34" charset="0"/>
+              </a:rPr>
+              <a:t> un balance </a:t>
+            </a:r>
+            <a:r>
+              <a:rPr kumimoji="0" lang="en-US" altLang="en-US" sz="1600" i="0" u="none" strike="noStrike" cap="none" normalizeH="0" baseline="0" dirty="0" err="1">
+                <a:ln>
+                  <a:noFill/>
+                </a:ln>
+                <a:solidFill>
+                  <a:schemeClr val="tx1"/>
+                </a:solidFill>
+                <a:effectLst/>
+                <a:latin typeface="Arial" panose="020B0604020202020204" pitchFamily="34" charset="0"/>
+              </a:rPr>
+              <a:t>óptimo</a:t>
+            </a:r>
+            <a:r>
+              <a:rPr kumimoji="0" lang="en-US" altLang="en-US" sz="1600" i="0" u="none" strike="noStrike" cap="none" normalizeH="0" baseline="0" dirty="0">
+                <a:ln>
+                  <a:noFill/>
+                </a:ln>
+                <a:solidFill>
+                  <a:schemeClr val="tx1"/>
+                </a:solidFill>
+                <a:effectLst/>
+                <a:latin typeface="Arial" panose="020B0604020202020204" pitchFamily="34" charset="0"/>
+              </a:rPr>
+              <a:t> entre </a:t>
+            </a:r>
+            <a:r>
+              <a:rPr kumimoji="0" lang="en-US" altLang="en-US" sz="1600" i="0" u="none" strike="noStrike" cap="none" normalizeH="0" baseline="0" dirty="0" err="1">
+                <a:ln>
+                  <a:noFill/>
+                </a:ln>
+                <a:solidFill>
+                  <a:schemeClr val="tx1"/>
+                </a:solidFill>
+                <a:effectLst/>
+                <a:latin typeface="Arial" panose="020B0604020202020204" pitchFamily="34" charset="0"/>
+              </a:rPr>
+              <a:t>precisión</a:t>
+            </a:r>
+            <a:r>
+              <a:rPr kumimoji="0" lang="en-US" altLang="en-US" sz="1600" i="0" u="none" strike="noStrike" cap="none" normalizeH="0" baseline="0" dirty="0">
+                <a:ln>
+                  <a:noFill/>
+                </a:ln>
+                <a:solidFill>
+                  <a:schemeClr val="tx1"/>
+                </a:solidFill>
+                <a:effectLst/>
+                <a:latin typeface="Arial" panose="020B0604020202020204" pitchFamily="34" charset="0"/>
+              </a:rPr>
+              <a:t> y </a:t>
+            </a:r>
+            <a:r>
+              <a:rPr kumimoji="0" lang="en-US" altLang="en-US" sz="1600" i="0" u="none" strike="noStrike" cap="none" normalizeH="0" baseline="0" dirty="0" err="1">
+                <a:ln>
+                  <a:noFill/>
+                </a:ln>
+                <a:solidFill>
+                  <a:schemeClr val="tx1"/>
+                </a:solidFill>
+                <a:effectLst/>
+                <a:latin typeface="Arial" panose="020B0604020202020204" pitchFamily="34" charset="0"/>
+              </a:rPr>
+              <a:t>estabilidad</a:t>
+            </a:r>
+            <a:r>
+              <a:rPr kumimoji="0" lang="en-US" altLang="en-US" sz="1600" i="0" u="none" strike="noStrike" cap="none" normalizeH="0" baseline="0" dirty="0">
+                <a:ln>
+                  <a:noFill/>
+                </a:ln>
+                <a:solidFill>
+                  <a:schemeClr val="tx1"/>
+                </a:solidFill>
+                <a:effectLst/>
+                <a:latin typeface="Arial" panose="020B0604020202020204" pitchFamily="34" charset="0"/>
+              </a:rPr>
+              <a:t>.</a:t>
+            </a:r>
+          </a:p>
+          <a:p>
+            <a:pPr marL="0" marR="0" lvl="0" indent="0" algn="l" defTabSz="914400" rtl="0" eaLnBrk="0" fontAlgn="base" latinLnBrk="0" hangingPunct="0">
+              <a:lnSpc>
+                <a:spcPct val="100000"/>
+              </a:lnSpc>
+              <a:spcBef>
+                <a:spcPct val="0"/>
+              </a:spcBef>
+              <a:spcAft>
+                <a:spcPct val="0"/>
+              </a:spcAft>
+              <a:buClrTx/>
+              <a:buSzTx/>
+              <a:buFontTx/>
+              <a:buChar char="•"/>
+              <a:tabLst/>
+            </a:pPr>
+            <a:r>
+              <a:rPr kumimoji="0" lang="en-US" altLang="en-US" sz="1600" i="0" u="none" strike="noStrike" cap="none" normalizeH="0" baseline="0" dirty="0" err="1">
+                <a:ln>
+                  <a:noFill/>
+                </a:ln>
+                <a:solidFill>
+                  <a:schemeClr val="tx1"/>
+                </a:solidFill>
+                <a:effectLst/>
+                <a:latin typeface="Arial" panose="020B0604020202020204" pitchFamily="34" charset="0"/>
+              </a:rPr>
+              <a:t>Superó</a:t>
+            </a:r>
+            <a:r>
+              <a:rPr kumimoji="0" lang="en-US" altLang="en-US" sz="1600" i="0" u="none" strike="noStrike" cap="none" normalizeH="0" baseline="0" dirty="0">
+                <a:ln>
+                  <a:noFill/>
+                </a:ln>
+                <a:solidFill>
+                  <a:schemeClr val="tx1"/>
+                </a:solidFill>
+                <a:effectLst/>
+                <a:latin typeface="Arial" panose="020B0604020202020204" pitchFamily="34" charset="0"/>
+              </a:rPr>
+              <a:t> a </a:t>
+            </a:r>
+            <a:r>
+              <a:rPr kumimoji="0" lang="en-US" altLang="en-US" sz="1600" i="0" u="none" strike="noStrike" cap="none" normalizeH="0" baseline="0" dirty="0" err="1">
+                <a:ln>
+                  <a:noFill/>
+                </a:ln>
+                <a:solidFill>
+                  <a:schemeClr val="tx1"/>
+                </a:solidFill>
+                <a:effectLst/>
+                <a:latin typeface="Arial" panose="020B0604020202020204" pitchFamily="34" charset="0"/>
+              </a:rPr>
+              <a:t>todos</a:t>
+            </a:r>
+            <a:r>
+              <a:rPr kumimoji="0" lang="en-US" altLang="en-US" sz="1600" i="0" u="none" strike="noStrike" cap="none" normalizeH="0" baseline="0" dirty="0">
+                <a:ln>
+                  <a:noFill/>
+                </a:ln>
+                <a:solidFill>
+                  <a:schemeClr val="tx1"/>
+                </a:solidFill>
+                <a:effectLst/>
+                <a:latin typeface="Arial" panose="020B0604020202020204" pitchFamily="34" charset="0"/>
+              </a:rPr>
+              <a:t> </a:t>
+            </a:r>
+            <a:r>
+              <a:rPr kumimoji="0" lang="en-US" altLang="en-US" sz="1600" i="0" u="none" strike="noStrike" cap="none" normalizeH="0" baseline="0" dirty="0" err="1">
+                <a:ln>
+                  <a:noFill/>
+                </a:ln>
+                <a:solidFill>
+                  <a:schemeClr val="tx1"/>
+                </a:solidFill>
+                <a:effectLst/>
+                <a:latin typeface="Arial" panose="020B0604020202020204" pitchFamily="34" charset="0"/>
+              </a:rPr>
+              <a:t>los</a:t>
+            </a:r>
+            <a:r>
+              <a:rPr kumimoji="0" lang="en-US" altLang="en-US" sz="1600" i="0" u="none" strike="noStrike" cap="none" normalizeH="0" baseline="0" dirty="0">
+                <a:ln>
+                  <a:noFill/>
+                </a:ln>
+                <a:solidFill>
+                  <a:schemeClr val="tx1"/>
+                </a:solidFill>
+                <a:effectLst/>
+                <a:latin typeface="Arial" panose="020B0604020202020204" pitchFamily="34" charset="0"/>
+              </a:rPr>
+              <a:t> </a:t>
+            </a:r>
+            <a:r>
+              <a:rPr kumimoji="0" lang="en-US" altLang="en-US" sz="1600" i="0" u="none" strike="noStrike" cap="none" normalizeH="0" baseline="0" dirty="0" err="1">
+                <a:ln>
+                  <a:noFill/>
+                </a:ln>
+                <a:solidFill>
+                  <a:schemeClr val="tx1"/>
+                </a:solidFill>
+                <a:effectLst/>
+                <a:latin typeface="Arial" panose="020B0604020202020204" pitchFamily="34" charset="0"/>
+              </a:rPr>
+              <a:t>modelos</a:t>
+            </a:r>
+            <a:r>
+              <a:rPr kumimoji="0" lang="en-US" altLang="en-US" sz="1600" i="0" u="none" strike="noStrike" cap="none" normalizeH="0" baseline="0" dirty="0">
+                <a:ln>
+                  <a:noFill/>
+                </a:ln>
+                <a:solidFill>
+                  <a:schemeClr val="tx1"/>
+                </a:solidFill>
+                <a:effectLst/>
+                <a:latin typeface="Arial" panose="020B0604020202020204" pitchFamily="34" charset="0"/>
+              </a:rPr>
+              <a:t> </a:t>
+            </a:r>
+            <a:r>
+              <a:rPr kumimoji="0" lang="en-US" altLang="en-US" sz="1600" i="0" u="none" strike="noStrike" cap="none" normalizeH="0" baseline="0" dirty="0" err="1">
+                <a:ln>
+                  <a:noFill/>
+                </a:ln>
+                <a:solidFill>
+                  <a:schemeClr val="tx1"/>
+                </a:solidFill>
+                <a:effectLst/>
+                <a:latin typeface="Arial" panose="020B0604020202020204" pitchFamily="34" charset="0"/>
+              </a:rPr>
+              <a:t>individuales</a:t>
+            </a:r>
+            <a:r>
+              <a:rPr kumimoji="0" lang="en-US" altLang="en-US" sz="1600" i="0" u="none" strike="noStrike" cap="none" normalizeH="0" baseline="0" dirty="0">
+                <a:ln>
+                  <a:noFill/>
+                </a:ln>
+                <a:solidFill>
+                  <a:schemeClr val="tx1"/>
+                </a:solidFill>
+                <a:effectLst/>
+                <a:latin typeface="Arial" panose="020B0604020202020204" pitchFamily="34" charset="0"/>
+              </a:rPr>
+              <a:t> </a:t>
+            </a:r>
+            <a:r>
+              <a:rPr kumimoji="0" lang="en-US" altLang="en-US" sz="1600" i="0" u="none" strike="noStrike" cap="none" normalizeH="0" baseline="0" dirty="0" err="1">
+                <a:ln>
+                  <a:noFill/>
+                </a:ln>
+                <a:solidFill>
+                  <a:schemeClr val="tx1"/>
+                </a:solidFill>
+                <a:effectLst/>
+                <a:latin typeface="Arial" panose="020B0604020202020204" pitchFamily="34" charset="0"/>
+              </a:rPr>
+              <a:t>en</a:t>
+            </a:r>
+            <a:r>
+              <a:rPr kumimoji="0" lang="en-US" altLang="en-US" sz="1600" i="0" u="none" strike="noStrike" cap="none" normalizeH="0" baseline="0" dirty="0">
+                <a:ln>
+                  <a:noFill/>
+                </a:ln>
+                <a:solidFill>
+                  <a:schemeClr val="tx1"/>
+                </a:solidFill>
+                <a:effectLst/>
+                <a:latin typeface="Arial" panose="020B0604020202020204" pitchFamily="34" charset="0"/>
+              </a:rPr>
+              <a:t> F1 (0.529) y </a:t>
+            </a:r>
+            <a:r>
+              <a:rPr kumimoji="0" lang="en-US" altLang="en-US" sz="1600" i="0" u="none" strike="noStrike" cap="none" normalizeH="0" baseline="0" dirty="0" err="1">
+                <a:ln>
+                  <a:noFill/>
+                </a:ln>
+                <a:solidFill>
+                  <a:schemeClr val="tx1"/>
+                </a:solidFill>
+                <a:effectLst/>
+                <a:latin typeface="Arial" panose="020B0604020202020204" pitchFamily="34" charset="0"/>
+              </a:rPr>
+              <a:t>en</a:t>
+            </a:r>
+            <a:r>
+              <a:rPr kumimoji="0" lang="en-US" altLang="en-US" sz="1600" i="0" u="none" strike="noStrike" cap="none" normalizeH="0" baseline="0" dirty="0">
+                <a:ln>
+                  <a:noFill/>
+                </a:ln>
+                <a:solidFill>
+                  <a:schemeClr val="tx1"/>
+                </a:solidFill>
+                <a:effectLst/>
+                <a:latin typeface="Arial" panose="020B0604020202020204" pitchFamily="34" charset="0"/>
+              </a:rPr>
+              <a:t> </a:t>
+            </a:r>
+            <a:r>
+              <a:rPr kumimoji="0" lang="en-US" altLang="en-US" sz="1600" i="0" u="none" strike="noStrike" cap="none" normalizeH="0" baseline="0" dirty="0" err="1">
+                <a:ln>
+                  <a:noFill/>
+                </a:ln>
+                <a:solidFill>
+                  <a:schemeClr val="tx1"/>
+                </a:solidFill>
+                <a:effectLst/>
+                <a:latin typeface="Arial" panose="020B0604020202020204" pitchFamily="34" charset="0"/>
+              </a:rPr>
+              <a:t>el</a:t>
+            </a:r>
+            <a:r>
+              <a:rPr kumimoji="0" lang="en-US" altLang="en-US" sz="1600" i="0" u="none" strike="noStrike" cap="none" normalizeH="0" baseline="0" dirty="0">
+                <a:ln>
+                  <a:noFill/>
+                </a:ln>
+                <a:solidFill>
+                  <a:schemeClr val="tx1"/>
+                </a:solidFill>
+                <a:effectLst/>
+                <a:latin typeface="Arial" panose="020B0604020202020204" pitchFamily="34" charset="0"/>
+              </a:rPr>
+              <a:t> </a:t>
+            </a:r>
+            <a:r>
+              <a:rPr kumimoji="0" lang="en-US" altLang="en-US" sz="1600" i="0" u="none" strike="noStrike" cap="none" normalizeH="0" baseline="0" dirty="0" err="1">
+                <a:ln>
+                  <a:noFill/>
+                </a:ln>
+                <a:solidFill>
+                  <a:schemeClr val="tx1"/>
+                </a:solidFill>
+                <a:effectLst/>
+                <a:latin typeface="Arial" panose="020B0604020202020204" pitchFamily="34" charset="0"/>
+              </a:rPr>
+              <a:t>puntaje</a:t>
+            </a:r>
+            <a:r>
+              <a:rPr kumimoji="0" lang="en-US" altLang="en-US" sz="1600" i="0" u="none" strike="noStrike" cap="none" normalizeH="0" baseline="0" dirty="0">
+                <a:ln>
+                  <a:noFill/>
+                </a:ln>
+                <a:solidFill>
+                  <a:schemeClr val="tx1"/>
+                </a:solidFill>
+                <a:effectLst/>
+                <a:latin typeface="Arial" panose="020B0604020202020204" pitchFamily="34" charset="0"/>
+              </a:rPr>
+              <a:t> de Kaggle (0.54).</a:t>
+            </a:r>
+          </a:p>
+          <a:p>
+            <a:pPr marL="0" marR="0" lvl="0" indent="0" algn="l" defTabSz="914400" rtl="0" eaLnBrk="0" fontAlgn="base" latinLnBrk="0" hangingPunct="0">
+              <a:lnSpc>
+                <a:spcPct val="100000"/>
+              </a:lnSpc>
+              <a:spcBef>
+                <a:spcPct val="0"/>
+              </a:spcBef>
+              <a:spcAft>
+                <a:spcPct val="0"/>
+              </a:spcAft>
+              <a:buClrTx/>
+              <a:buSzTx/>
+              <a:buFontTx/>
+              <a:buChar char="•"/>
+              <a:tabLst/>
+            </a:pPr>
+            <a:r>
+              <a:rPr kumimoji="0" lang="en-US" altLang="en-US" sz="1600" i="0" u="none" strike="noStrike" cap="none" normalizeH="0" baseline="0" dirty="0" err="1">
+                <a:ln>
+                  <a:noFill/>
+                </a:ln>
+                <a:solidFill>
+                  <a:schemeClr val="tx1"/>
+                </a:solidFill>
+                <a:effectLst/>
+                <a:latin typeface="Arial" panose="020B0604020202020204" pitchFamily="34" charset="0"/>
+              </a:rPr>
+              <a:t>Evitó</a:t>
+            </a:r>
+            <a:r>
+              <a:rPr kumimoji="0" lang="en-US" altLang="en-US" sz="1600" i="0" u="none" strike="noStrike" cap="none" normalizeH="0" baseline="0" dirty="0">
+                <a:ln>
+                  <a:noFill/>
+                </a:ln>
+                <a:solidFill>
+                  <a:schemeClr val="tx1"/>
+                </a:solidFill>
+                <a:effectLst/>
+                <a:latin typeface="Arial" panose="020B0604020202020204" pitchFamily="34" charset="0"/>
+              </a:rPr>
+              <a:t> </a:t>
+            </a:r>
+            <a:r>
+              <a:rPr kumimoji="0" lang="en-US" altLang="en-US" sz="1600" i="0" u="none" strike="noStrike" cap="none" normalizeH="0" baseline="0" dirty="0" err="1">
+                <a:ln>
+                  <a:noFill/>
+                </a:ln>
+                <a:solidFill>
+                  <a:schemeClr val="tx1"/>
+                </a:solidFill>
+                <a:effectLst/>
+                <a:latin typeface="Arial" panose="020B0604020202020204" pitchFamily="34" charset="0"/>
+              </a:rPr>
+              <a:t>el</a:t>
+            </a:r>
+            <a:r>
+              <a:rPr kumimoji="0" lang="en-US" altLang="en-US" sz="1600" i="0" u="none" strike="noStrike" cap="none" normalizeH="0" baseline="0" dirty="0">
+                <a:ln>
+                  <a:noFill/>
+                </a:ln>
+                <a:solidFill>
+                  <a:schemeClr val="tx1"/>
+                </a:solidFill>
+                <a:effectLst/>
+                <a:latin typeface="Arial" panose="020B0604020202020204" pitchFamily="34" charset="0"/>
+              </a:rPr>
+              <a:t> </a:t>
+            </a:r>
+            <a:r>
+              <a:rPr kumimoji="0" lang="en-US" altLang="en-US" sz="1600" i="0" u="none" strike="noStrike" cap="none" normalizeH="0" baseline="0" dirty="0" err="1">
+                <a:ln>
+                  <a:noFill/>
+                </a:ln>
+                <a:solidFill>
+                  <a:schemeClr val="tx1"/>
+                </a:solidFill>
+                <a:effectLst/>
+                <a:latin typeface="Arial" panose="020B0604020202020204" pitchFamily="34" charset="0"/>
+              </a:rPr>
+              <a:t>sobreajuste</a:t>
+            </a:r>
+            <a:r>
+              <a:rPr kumimoji="0" lang="en-US" altLang="en-US" sz="1600" i="0" u="none" strike="noStrike" cap="none" normalizeH="0" baseline="0" dirty="0">
+                <a:ln>
+                  <a:noFill/>
+                </a:ln>
+                <a:solidFill>
+                  <a:schemeClr val="tx1"/>
+                </a:solidFill>
+                <a:effectLst/>
+                <a:latin typeface="Arial" panose="020B0604020202020204" pitchFamily="34" charset="0"/>
+              </a:rPr>
+              <a:t> de CART y la </a:t>
+            </a:r>
+            <a:r>
+              <a:rPr kumimoji="0" lang="en-US" altLang="en-US" sz="1600" i="0" u="none" strike="noStrike" cap="none" normalizeH="0" baseline="0" dirty="0" err="1">
+                <a:ln>
+                  <a:noFill/>
+                </a:ln>
+                <a:solidFill>
+                  <a:schemeClr val="tx1"/>
+                </a:solidFill>
+                <a:effectLst/>
+                <a:latin typeface="Arial" panose="020B0604020202020204" pitchFamily="34" charset="0"/>
+              </a:rPr>
+              <a:t>pérdida</a:t>
+            </a:r>
+            <a:r>
+              <a:rPr kumimoji="0" lang="en-US" altLang="en-US" sz="1600" i="0" u="none" strike="noStrike" cap="none" normalizeH="0" baseline="0" dirty="0">
+                <a:ln>
+                  <a:noFill/>
+                </a:ln>
+                <a:solidFill>
+                  <a:schemeClr val="tx1"/>
+                </a:solidFill>
+                <a:effectLst/>
+                <a:latin typeface="Arial" panose="020B0604020202020204" pitchFamily="34" charset="0"/>
+              </a:rPr>
+              <a:t> de </a:t>
+            </a:r>
+            <a:r>
+              <a:rPr kumimoji="0" lang="en-US" altLang="en-US" sz="1600" i="0" u="none" strike="noStrike" cap="none" normalizeH="0" baseline="0" dirty="0" err="1">
+                <a:ln>
+                  <a:noFill/>
+                </a:ln>
+                <a:solidFill>
+                  <a:schemeClr val="tx1"/>
+                </a:solidFill>
+                <a:effectLst/>
+                <a:latin typeface="Arial" panose="020B0604020202020204" pitchFamily="34" charset="0"/>
+              </a:rPr>
+              <a:t>información</a:t>
+            </a:r>
+            <a:r>
+              <a:rPr kumimoji="0" lang="en-US" altLang="en-US" sz="1600" i="0" u="none" strike="noStrike" cap="none" normalizeH="0" baseline="0" dirty="0">
+                <a:ln>
+                  <a:noFill/>
+                </a:ln>
+                <a:solidFill>
+                  <a:schemeClr val="tx1"/>
+                </a:solidFill>
+                <a:effectLst/>
+                <a:latin typeface="Arial" panose="020B0604020202020204" pitchFamily="34" charset="0"/>
+              </a:rPr>
+              <a:t> del Random Forest con </a:t>
+            </a:r>
+            <a:r>
+              <a:rPr kumimoji="0" lang="en-US" altLang="en-US" sz="1600" i="0" u="none" strike="noStrike" cap="none" normalizeH="0" baseline="0" dirty="0" err="1">
+                <a:ln>
+                  <a:noFill/>
+                </a:ln>
+                <a:solidFill>
+                  <a:schemeClr val="tx1"/>
+                </a:solidFill>
+                <a:effectLst/>
+                <a:latin typeface="Arial" panose="020B0604020202020204" pitchFamily="34" charset="0"/>
+              </a:rPr>
+              <a:t>el</a:t>
+            </a:r>
+            <a:r>
+              <a:rPr kumimoji="0" lang="en-US" altLang="en-US" sz="1600" i="0" u="none" strike="noStrike" cap="none" normalizeH="0" baseline="0" dirty="0">
+                <a:ln>
+                  <a:noFill/>
+                </a:ln>
+                <a:solidFill>
+                  <a:schemeClr val="tx1"/>
+                </a:solidFill>
+                <a:effectLst/>
+                <a:latin typeface="Arial" panose="020B0604020202020204" pitchFamily="34" charset="0"/>
+              </a:rPr>
+              <a:t> </a:t>
+            </a:r>
+            <a:r>
+              <a:rPr kumimoji="0" lang="en-US" altLang="en-US" sz="1600" i="0" u="none" strike="noStrike" cap="none" normalizeH="0" baseline="0" dirty="0" err="1">
+                <a:ln>
+                  <a:noFill/>
+                </a:ln>
+                <a:solidFill>
+                  <a:schemeClr val="tx1"/>
+                </a:solidFill>
+                <a:effectLst/>
+                <a:latin typeface="Arial" panose="020B0604020202020204" pitchFamily="34" charset="0"/>
+              </a:rPr>
+              <a:t>balanceo</a:t>
+            </a:r>
+            <a:r>
+              <a:rPr kumimoji="0" lang="en-US" altLang="en-US" sz="1600" i="0" u="none" strike="noStrike" cap="none" normalizeH="0" baseline="0" dirty="0">
+                <a:ln>
+                  <a:noFill/>
+                </a:ln>
+                <a:solidFill>
+                  <a:schemeClr val="tx1"/>
+                </a:solidFill>
+                <a:effectLst/>
+                <a:latin typeface="Arial" panose="020B0604020202020204" pitchFamily="34" charset="0"/>
+              </a:rPr>
+              <a:t> </a:t>
+            </a:r>
+            <a:r>
+              <a:rPr kumimoji="0" lang="en-US" altLang="en-US" sz="1600" i="0" u="none" strike="noStrike" cap="none" normalizeH="0" baseline="0" dirty="0" err="1">
+                <a:ln>
+                  <a:noFill/>
+                </a:ln>
+                <a:solidFill>
+                  <a:schemeClr val="tx1"/>
+                </a:solidFill>
+                <a:effectLst/>
+                <a:latin typeface="Arial" panose="020B0604020202020204" pitchFamily="34" charset="0"/>
+              </a:rPr>
+              <a:t>Downsampling</a:t>
+            </a:r>
+            <a:r>
+              <a:rPr kumimoji="0" lang="en-US" altLang="en-US" sz="1600" i="0" u="none" strike="noStrike" cap="none" normalizeH="0" baseline="0" dirty="0">
+                <a:ln>
+                  <a:noFill/>
+                </a:ln>
+                <a:solidFill>
+                  <a:schemeClr val="tx1"/>
+                </a:solidFill>
+                <a:effectLst/>
+                <a:latin typeface="Arial" panose="020B0604020202020204" pitchFamily="34" charset="0"/>
+              </a:rPr>
+              <a:t>.</a:t>
+            </a:r>
+          </a:p>
+          <a:p>
+            <a:pPr marL="0" marR="0" lvl="0" indent="0" algn="l" defTabSz="914400" rtl="0" eaLnBrk="0" fontAlgn="base" latinLnBrk="0" hangingPunct="0">
+              <a:lnSpc>
+                <a:spcPct val="100000"/>
+              </a:lnSpc>
+              <a:spcBef>
+                <a:spcPct val="0"/>
+              </a:spcBef>
+              <a:spcAft>
+                <a:spcPct val="0"/>
+              </a:spcAft>
+              <a:buClrTx/>
+              <a:buSzTx/>
+              <a:buFontTx/>
+              <a:buChar char="•"/>
+              <a:tabLst/>
+            </a:pPr>
+            <a:r>
+              <a:rPr kumimoji="0" lang="en-US" altLang="en-US" sz="1600" i="0" u="none" strike="noStrike" cap="none" normalizeH="0" baseline="0" dirty="0" err="1">
+                <a:ln>
+                  <a:noFill/>
+                </a:ln>
+                <a:solidFill>
+                  <a:schemeClr val="tx1"/>
+                </a:solidFill>
+                <a:effectLst/>
+                <a:latin typeface="Arial" panose="020B0604020202020204" pitchFamily="34" charset="0"/>
+              </a:rPr>
+              <a:t>Mantiene</a:t>
+            </a:r>
+            <a:r>
+              <a:rPr kumimoji="0" lang="en-US" altLang="en-US" sz="1600" i="0" u="none" strike="noStrike" cap="none" normalizeH="0" baseline="0" dirty="0">
+                <a:ln>
+                  <a:noFill/>
+                </a:ln>
+                <a:solidFill>
+                  <a:schemeClr val="tx1"/>
+                </a:solidFill>
+                <a:effectLst/>
+                <a:latin typeface="Arial" panose="020B0604020202020204" pitchFamily="34" charset="0"/>
+              </a:rPr>
+              <a:t> </a:t>
+            </a:r>
+            <a:r>
+              <a:rPr kumimoji="0" lang="en-US" altLang="en-US" sz="1600" i="0" u="none" strike="noStrike" cap="none" normalizeH="0" baseline="0" dirty="0" err="1">
+                <a:ln>
+                  <a:noFill/>
+                </a:ln>
+                <a:solidFill>
+                  <a:schemeClr val="tx1"/>
+                </a:solidFill>
+                <a:effectLst/>
+                <a:latin typeface="Arial" panose="020B0604020202020204" pitchFamily="34" charset="0"/>
+              </a:rPr>
+              <a:t>buena</a:t>
+            </a:r>
+            <a:r>
+              <a:rPr kumimoji="0" lang="en-US" altLang="en-US" sz="1600" i="0" u="none" strike="noStrike" cap="none" normalizeH="0" baseline="0" dirty="0">
+                <a:ln>
+                  <a:noFill/>
+                </a:ln>
+                <a:solidFill>
+                  <a:schemeClr val="tx1"/>
+                </a:solidFill>
+                <a:effectLst/>
+                <a:latin typeface="Arial" panose="020B0604020202020204" pitchFamily="34" charset="0"/>
+              </a:rPr>
+              <a:t> </a:t>
+            </a:r>
+            <a:r>
+              <a:rPr kumimoji="0" lang="en-US" altLang="en-US" sz="1600" i="0" u="none" strike="noStrike" cap="none" normalizeH="0" baseline="0" dirty="0" err="1">
+                <a:ln>
+                  <a:noFill/>
+                </a:ln>
+                <a:solidFill>
+                  <a:schemeClr val="tx1"/>
+                </a:solidFill>
+                <a:effectLst/>
+                <a:latin typeface="Arial" panose="020B0604020202020204" pitchFamily="34" charset="0"/>
+              </a:rPr>
+              <a:t>interpretabilidad</a:t>
+            </a:r>
+            <a:r>
+              <a:rPr kumimoji="0" lang="en-US" altLang="en-US" sz="1600" i="0" u="none" strike="noStrike" cap="none" normalizeH="0" baseline="0" dirty="0">
+                <a:ln>
+                  <a:noFill/>
+                </a:ln>
+                <a:solidFill>
+                  <a:schemeClr val="tx1"/>
+                </a:solidFill>
+                <a:effectLst/>
+                <a:latin typeface="Arial" panose="020B0604020202020204" pitchFamily="34" charset="0"/>
+              </a:rPr>
+              <a:t> sin </a:t>
+            </a:r>
+            <a:r>
+              <a:rPr kumimoji="0" lang="en-US" altLang="en-US" sz="1600" i="0" u="none" strike="noStrike" cap="none" normalizeH="0" baseline="0" dirty="0" err="1">
+                <a:ln>
+                  <a:noFill/>
+                </a:ln>
+                <a:solidFill>
+                  <a:schemeClr val="tx1"/>
+                </a:solidFill>
+                <a:effectLst/>
+                <a:latin typeface="Arial" panose="020B0604020202020204" pitchFamily="34" charset="0"/>
+              </a:rPr>
+              <a:t>sacrificar</a:t>
+            </a:r>
+            <a:r>
+              <a:rPr kumimoji="0" lang="en-US" altLang="en-US" sz="1600" i="0" u="none" strike="noStrike" cap="none" normalizeH="0" baseline="0" dirty="0">
+                <a:ln>
+                  <a:noFill/>
+                </a:ln>
+                <a:solidFill>
+                  <a:schemeClr val="tx1"/>
+                </a:solidFill>
+                <a:effectLst/>
+                <a:latin typeface="Arial" panose="020B0604020202020204" pitchFamily="34" charset="0"/>
+              </a:rPr>
+              <a:t> </a:t>
+            </a:r>
+            <a:r>
+              <a:rPr kumimoji="0" lang="en-US" altLang="en-US" sz="1600" i="0" u="none" strike="noStrike" cap="none" normalizeH="0" baseline="0" dirty="0" err="1">
+                <a:ln>
+                  <a:noFill/>
+                </a:ln>
+                <a:solidFill>
+                  <a:schemeClr val="tx1"/>
+                </a:solidFill>
+                <a:effectLst/>
+                <a:latin typeface="Arial" panose="020B0604020202020204" pitchFamily="34" charset="0"/>
+              </a:rPr>
+              <a:t>rendimiento</a:t>
+            </a:r>
+            <a:r>
+              <a:rPr kumimoji="0" lang="en-US" altLang="en-US" sz="1600" i="0" u="none" strike="noStrike" cap="none" normalizeH="0" baseline="0" dirty="0">
+                <a:ln>
+                  <a:noFill/>
+                </a:ln>
+                <a:solidFill>
+                  <a:schemeClr val="tx1"/>
+                </a:solidFill>
+                <a:effectLst/>
+                <a:latin typeface="Arial" panose="020B0604020202020204" pitchFamily="34" charset="0"/>
+              </a:rPr>
+              <a:t> </a:t>
+            </a:r>
+            <a:r>
+              <a:rPr kumimoji="0" lang="en-US" altLang="en-US" sz="1600" i="0" u="none" strike="noStrike" cap="none" normalizeH="0" baseline="0" dirty="0" err="1">
+                <a:ln>
+                  <a:noFill/>
+                </a:ln>
+                <a:solidFill>
+                  <a:schemeClr val="tx1"/>
+                </a:solidFill>
+                <a:effectLst/>
+                <a:latin typeface="Arial" panose="020B0604020202020204" pitchFamily="34" charset="0"/>
+              </a:rPr>
+              <a:t>predictivo</a:t>
+            </a:r>
+            <a:r>
+              <a:rPr kumimoji="0" lang="en-US" altLang="en-US" sz="1600" i="0" u="none" strike="noStrike" cap="none" normalizeH="0" baseline="0" dirty="0">
+                <a:ln>
+                  <a:noFill/>
+                </a:ln>
+                <a:solidFill>
+                  <a:schemeClr val="tx1"/>
+                </a:solidFill>
+                <a:effectLst/>
+                <a:latin typeface="Arial" panose="020B0604020202020204" pitchFamily="34" charset="0"/>
+              </a:rPr>
+              <a:t>.</a:t>
+            </a:r>
+          </a:p>
+          <a:p>
+            <a:pPr marL="0" marR="0" lvl="0" indent="0" algn="l" defTabSz="914400" rtl="0" eaLnBrk="0" fontAlgn="base" latinLnBrk="0" hangingPunct="0">
+              <a:lnSpc>
+                <a:spcPct val="100000"/>
+              </a:lnSpc>
+              <a:spcBef>
+                <a:spcPct val="0"/>
+              </a:spcBef>
+              <a:spcAft>
+                <a:spcPct val="0"/>
+              </a:spcAft>
+              <a:buClrTx/>
+              <a:buSzTx/>
+              <a:buFontTx/>
+              <a:buChar char="•"/>
+              <a:tabLst/>
+            </a:pPr>
+            <a:r>
+              <a:rPr kumimoji="0" lang="en-US" altLang="en-US" sz="1600" i="0" u="none" strike="noStrike" cap="none" normalizeH="0" baseline="0" dirty="0" err="1">
+                <a:ln>
+                  <a:noFill/>
+                </a:ln>
+                <a:solidFill>
+                  <a:schemeClr val="tx1"/>
+                </a:solidFill>
+                <a:effectLst/>
+                <a:latin typeface="Arial" panose="020B0604020202020204" pitchFamily="34" charset="0"/>
+              </a:rPr>
+              <a:t>Representa</a:t>
+            </a:r>
+            <a:r>
+              <a:rPr kumimoji="0" lang="en-US" altLang="en-US" sz="1600" i="0" u="none" strike="noStrike" cap="none" normalizeH="0" baseline="0" dirty="0">
+                <a:ln>
+                  <a:noFill/>
+                </a:ln>
+                <a:solidFill>
+                  <a:schemeClr val="tx1"/>
+                </a:solidFill>
+                <a:effectLst/>
+                <a:latin typeface="Arial" panose="020B0604020202020204" pitchFamily="34" charset="0"/>
+              </a:rPr>
+              <a:t> </a:t>
+            </a:r>
+            <a:r>
+              <a:rPr kumimoji="0" lang="en-US" altLang="en-US" sz="1600" i="0" u="none" strike="noStrike" cap="none" normalizeH="0" baseline="0" dirty="0" err="1">
+                <a:ln>
+                  <a:noFill/>
+                </a:ln>
+                <a:solidFill>
+                  <a:schemeClr val="tx1"/>
+                </a:solidFill>
+                <a:effectLst/>
+                <a:latin typeface="Arial" panose="020B0604020202020204" pitchFamily="34" charset="0"/>
+              </a:rPr>
+              <a:t>el</a:t>
+            </a:r>
+            <a:r>
+              <a:rPr kumimoji="0" lang="en-US" altLang="en-US" sz="1600" i="0" u="none" strike="noStrike" cap="none" normalizeH="0" baseline="0" dirty="0">
+                <a:ln>
+                  <a:noFill/>
+                </a:ln>
+                <a:solidFill>
+                  <a:schemeClr val="tx1"/>
+                </a:solidFill>
+                <a:effectLst/>
+                <a:latin typeface="Arial" panose="020B0604020202020204" pitchFamily="34" charset="0"/>
+              </a:rPr>
+              <a:t> </a:t>
+            </a:r>
+            <a:r>
+              <a:rPr kumimoji="0" lang="en-US" altLang="en-US" sz="1600" i="0" u="none" strike="noStrike" cap="none" normalizeH="0" baseline="0" dirty="0" err="1">
+                <a:ln>
+                  <a:noFill/>
+                </a:ln>
+                <a:solidFill>
+                  <a:schemeClr val="tx1"/>
+                </a:solidFill>
+                <a:effectLst/>
+                <a:latin typeface="Arial" panose="020B0604020202020204" pitchFamily="34" charset="0"/>
+              </a:rPr>
+              <a:t>modelo</a:t>
+            </a:r>
+            <a:r>
+              <a:rPr kumimoji="0" lang="en-US" altLang="en-US" sz="1600" i="0" u="none" strike="noStrike" cap="none" normalizeH="0" baseline="0" dirty="0">
+                <a:ln>
+                  <a:noFill/>
+                </a:ln>
+                <a:solidFill>
+                  <a:schemeClr val="tx1"/>
+                </a:solidFill>
+                <a:effectLst/>
+                <a:latin typeface="Arial" panose="020B0604020202020204" pitchFamily="34" charset="0"/>
+              </a:rPr>
+              <a:t> </a:t>
+            </a:r>
+            <a:r>
+              <a:rPr kumimoji="0" lang="en-US" altLang="en-US" sz="1600" i="0" u="none" strike="noStrike" cap="none" normalizeH="0" baseline="0" dirty="0" err="1">
+                <a:ln>
+                  <a:noFill/>
+                </a:ln>
+                <a:solidFill>
+                  <a:schemeClr val="tx1"/>
+                </a:solidFill>
+                <a:effectLst/>
+                <a:latin typeface="Arial" panose="020B0604020202020204" pitchFamily="34" charset="0"/>
+              </a:rPr>
+              <a:t>más</a:t>
+            </a:r>
+            <a:r>
+              <a:rPr kumimoji="0" lang="en-US" altLang="en-US" sz="1600" i="0" u="none" strike="noStrike" cap="none" normalizeH="0" baseline="0" dirty="0">
+                <a:ln>
+                  <a:noFill/>
+                </a:ln>
+                <a:solidFill>
+                  <a:schemeClr val="tx1"/>
+                </a:solidFill>
+                <a:effectLst/>
+                <a:latin typeface="Arial" panose="020B0604020202020204" pitchFamily="34" charset="0"/>
+              </a:rPr>
+              <a:t> </a:t>
+            </a:r>
+            <a:r>
+              <a:rPr kumimoji="0" lang="en-US" altLang="en-US" sz="1600" i="0" u="none" strike="noStrike" cap="none" normalizeH="0" baseline="0" dirty="0" err="1">
+                <a:ln>
+                  <a:noFill/>
+                </a:ln>
+                <a:solidFill>
+                  <a:schemeClr val="tx1"/>
+                </a:solidFill>
+                <a:effectLst/>
+                <a:latin typeface="Arial" panose="020B0604020202020204" pitchFamily="34" charset="0"/>
+              </a:rPr>
+              <a:t>equilibrado</a:t>
+            </a:r>
+            <a:r>
+              <a:rPr kumimoji="0" lang="en-US" altLang="en-US" sz="1600" i="0" u="none" strike="noStrike" cap="none" normalizeH="0" baseline="0" dirty="0">
+                <a:ln>
+                  <a:noFill/>
+                </a:ln>
+                <a:solidFill>
+                  <a:schemeClr val="tx1"/>
+                </a:solidFill>
+                <a:effectLst/>
+                <a:latin typeface="Arial" panose="020B0604020202020204" pitchFamily="34" charset="0"/>
+              </a:rPr>
+              <a:t> y </a:t>
+            </a:r>
+            <a:r>
+              <a:rPr kumimoji="0" lang="en-US" altLang="en-US" sz="1600" i="0" u="none" strike="noStrike" cap="none" normalizeH="0" baseline="0" dirty="0" err="1">
+                <a:ln>
+                  <a:noFill/>
+                </a:ln>
+                <a:solidFill>
+                  <a:schemeClr val="tx1"/>
+                </a:solidFill>
+                <a:effectLst/>
+                <a:latin typeface="Arial" panose="020B0604020202020204" pitchFamily="34" charset="0"/>
+              </a:rPr>
+              <a:t>consistente</a:t>
+            </a:r>
+            <a:r>
+              <a:rPr kumimoji="0" lang="en-US" altLang="en-US" sz="1600" i="0" u="none" strike="noStrike" cap="none" normalizeH="0" baseline="0" dirty="0">
+                <a:ln>
+                  <a:noFill/>
+                </a:ln>
+                <a:solidFill>
+                  <a:schemeClr val="tx1"/>
+                </a:solidFill>
+                <a:effectLst/>
+                <a:latin typeface="Arial" panose="020B0604020202020204" pitchFamily="34" charset="0"/>
+              </a:rPr>
+              <a:t> </a:t>
+            </a:r>
+            <a:r>
+              <a:rPr kumimoji="0" lang="en-US" altLang="en-US" sz="1600" i="0" u="none" strike="noStrike" cap="none" normalizeH="0" baseline="0" dirty="0" err="1">
+                <a:ln>
+                  <a:noFill/>
+                </a:ln>
+                <a:solidFill>
+                  <a:schemeClr val="tx1"/>
+                </a:solidFill>
+                <a:effectLst/>
+                <a:latin typeface="Arial" panose="020B0604020202020204" pitchFamily="34" charset="0"/>
+              </a:rPr>
+              <a:t>frente</a:t>
+            </a:r>
+            <a:r>
+              <a:rPr kumimoji="0" lang="en-US" altLang="en-US" sz="1600" i="0" u="none" strike="noStrike" cap="none" normalizeH="0" baseline="0" dirty="0">
+                <a:ln>
+                  <a:noFill/>
+                </a:ln>
+                <a:solidFill>
+                  <a:schemeClr val="tx1"/>
+                </a:solidFill>
+                <a:effectLst/>
+                <a:latin typeface="Arial" panose="020B0604020202020204" pitchFamily="34" charset="0"/>
+              </a:rPr>
+              <a:t> a la </a:t>
+            </a:r>
+            <a:r>
+              <a:rPr kumimoji="0" lang="en-US" altLang="en-US" sz="1600" i="0" u="none" strike="noStrike" cap="none" normalizeH="0" baseline="0" dirty="0" err="1">
+                <a:ln>
+                  <a:noFill/>
+                </a:ln>
+                <a:solidFill>
+                  <a:schemeClr val="tx1"/>
+                </a:solidFill>
+                <a:effectLst/>
+                <a:latin typeface="Arial" panose="020B0604020202020204" pitchFamily="34" charset="0"/>
+              </a:rPr>
+              <a:t>complejidad</a:t>
+            </a:r>
+            <a:r>
+              <a:rPr kumimoji="0" lang="en-US" altLang="en-US" sz="1600" i="0" u="none" strike="noStrike" cap="none" normalizeH="0" baseline="0" dirty="0">
+                <a:ln>
+                  <a:noFill/>
+                </a:ln>
+                <a:solidFill>
+                  <a:schemeClr val="tx1"/>
+                </a:solidFill>
+                <a:effectLst/>
+                <a:latin typeface="Arial" panose="020B0604020202020204" pitchFamily="34" charset="0"/>
+              </a:rPr>
+              <a:t> del </a:t>
+            </a:r>
+            <a:r>
+              <a:rPr kumimoji="0" lang="en-US" altLang="en-US" sz="1600" i="0" u="none" strike="noStrike" cap="none" normalizeH="0" baseline="0" dirty="0" err="1">
+                <a:ln>
+                  <a:noFill/>
+                </a:ln>
+                <a:solidFill>
+                  <a:schemeClr val="tx1"/>
+                </a:solidFill>
+                <a:effectLst/>
+                <a:latin typeface="Arial" panose="020B0604020202020204" pitchFamily="34" charset="0"/>
+              </a:rPr>
+              <a:t>problema</a:t>
+            </a:r>
+            <a:r>
+              <a:rPr kumimoji="0" lang="en-US" altLang="en-US" sz="1600" i="0" u="none" strike="noStrike" cap="none" normalizeH="0" baseline="0" dirty="0">
+                <a:ln>
+                  <a:noFill/>
+                </a:ln>
+                <a:solidFill>
+                  <a:schemeClr val="tx1"/>
+                </a:solidFill>
+                <a:effectLst/>
+                <a:latin typeface="Arial" panose="020B0604020202020204" pitchFamily="34" charset="0"/>
+              </a:rPr>
+              <a:t>.</a:t>
+            </a:r>
           </a:p>
         </p:txBody>
       </p:sp>
     </p:spTree>
     <p:extLst>
       <p:ext uri="{BB962C8B-B14F-4D97-AF65-F5344CB8AC3E}">
-        <p14:creationId xmlns:p14="http://schemas.microsoft.com/office/powerpoint/2010/main" val="146639435"/>
+        <p14:creationId xmlns:p14="http://schemas.microsoft.com/office/powerpoint/2010/main" val="3709066549"/>
       </p:ext>
     </p:extLst>
   </p:cSld>

--- a/Presentaciones/othermodels_equipo_08.pptx
+++ b/Presentaciones/othermodels_equipo_08.pptx
@@ -3556,8 +3556,10 @@
               <a:defRPr/>
             </a:pPr>
             <a:r>
-              <a:rPr lang="es-CO" b="1" dirty="0"/>
-              <a:t>Limpieza de datos, transformación de variables, definición de bases de datos finales.</a:t>
+              <a:rPr lang="es-CO" dirty="0">
+                <a:latin typeface="Arial Black" panose="020B0A04020102020204" pitchFamily="34" charset="0"/>
+              </a:rPr>
+              <a:t>OTROS MODELOS</a:t>
             </a:r>
           </a:p>
         </p:txBody>
@@ -3604,7 +3606,7 @@
         </p:nvSpPr>
         <p:spPr>
           <a:xfrm>
-            <a:off x="1042988" y="981075"/>
+            <a:off x="971600" y="1583696"/>
             <a:ext cx="8229600" cy="500063"/>
           </a:xfrm>
         </p:spPr>
@@ -3714,8 +3716,8 @@
         </p:blipFill>
         <p:spPr>
           <a:xfrm>
-            <a:off x="0" y="2083759"/>
-            <a:ext cx="9144000" cy="2690481"/>
+            <a:off x="901050" y="2083759"/>
+            <a:ext cx="8242950" cy="2425361"/>
           </a:xfrm>
           <a:prstGeom prst="rect">
             <a:avLst/>
@@ -3770,7 +3772,7 @@
         </p:nvSpPr>
         <p:spPr>
           <a:xfrm>
-            <a:off x="1115616" y="1102274"/>
+            <a:off x="1043608" y="1562375"/>
             <a:ext cx="8229600" cy="500062"/>
           </a:xfrm>
         </p:spPr>
@@ -3824,8 +3826,8 @@
         </p:blipFill>
         <p:spPr>
           <a:xfrm>
-            <a:off x="0" y="1859935"/>
-            <a:ext cx="9144000" cy="3138129"/>
+            <a:off x="914400" y="2032399"/>
+            <a:ext cx="8138936" cy="2793201"/>
           </a:xfrm>
         </p:spPr>
       </p:pic>
@@ -4047,7 +4049,7 @@
         </p:nvSpPr>
         <p:spPr>
           <a:xfrm>
-            <a:off x="3419871" y="1556792"/>
+            <a:off x="1034218" y="1844824"/>
             <a:ext cx="2304256" cy="500062"/>
           </a:xfrm>
         </p:spPr>
@@ -4093,8 +4095,8 @@
         </p:blipFill>
         <p:spPr>
           <a:xfrm>
-            <a:off x="32012" y="2420888"/>
-            <a:ext cx="9079975" cy="2675577"/>
+            <a:off x="1034218" y="2420888"/>
+            <a:ext cx="8077769" cy="2380259"/>
           </a:xfrm>
         </p:spPr>
       </p:pic>
@@ -4146,8 +4148,8 @@
         </p:nvSpPr>
         <p:spPr>
           <a:xfrm>
-            <a:off x="1237605" y="1772816"/>
-            <a:ext cx="6668789" cy="500062"/>
+            <a:off x="755577" y="1772816"/>
+            <a:ext cx="7150818" cy="500062"/>
           </a:xfrm>
         </p:spPr>
         <p:txBody>
@@ -4156,7 +4158,7 @@
           <a:p>
             <a:r>
               <a:rPr lang="es-ES" dirty="0"/>
-              <a:t>Por qué </a:t>
+              <a:t>¿Por qué </a:t>
             </a:r>
             <a:r>
               <a:rPr lang="es-ES" dirty="0" err="1"/>
@@ -4164,7 +4166,7 @@
             </a:r>
             <a:r>
               <a:rPr lang="es-ES" dirty="0"/>
-              <a:t>-CART superó a los demás</a:t>
+              <a:t>-CART superó a los demás?</a:t>
             </a:r>
             <a:endParaRPr lang="en-US" dirty="0"/>
           </a:p>
@@ -4188,8 +4190,8 @@
         </p:nvSpPr>
         <p:spPr bwMode="auto">
           <a:xfrm>
-            <a:off x="827584" y="2513802"/>
-            <a:ext cx="8229600" cy="3293209"/>
+            <a:off x="885248" y="2883133"/>
+            <a:ext cx="8229600" cy="3046988"/>
           </a:xfrm>
           <a:prstGeom prst="rect">
             <a:avLst/>
@@ -4237,21 +4239,10 @@
           </a:bodyPr>
           <a:lstStyle/>
           <a:p>
-            <a:pPr marL="0" marR="0" lvl="0" indent="0" algn="l" defTabSz="914400" rtl="0" eaLnBrk="0" fontAlgn="base" latinLnBrk="0" hangingPunct="0">
-              <a:lnSpc>
-                <a:spcPct val="100000"/>
-              </a:lnSpc>
+            <a:pPr>
               <a:spcBef>
                 <a:spcPct val="0"/>
               </a:spcBef>
-              <a:spcAft>
-                <a:spcPct val="0"/>
-              </a:spcAft>
-              <a:buClrTx/>
-              <a:buSzTx/>
-              <a:buFontTx/>
-              <a:buChar char="•"/>
-              <a:tabLst/>
             </a:pPr>
             <a:r>
               <a:rPr kumimoji="0" lang="en-US" altLang="en-US" sz="1600" i="0" u="none" strike="noStrike" cap="none" normalizeH="0" baseline="0" dirty="0">
@@ -4424,21 +4415,10 @@
             </a:r>
           </a:p>
           <a:p>
-            <a:pPr marL="0" marR="0" lvl="0" indent="0" algn="l" defTabSz="914400" rtl="0" eaLnBrk="0" fontAlgn="base" latinLnBrk="0" hangingPunct="0">
-              <a:lnSpc>
-                <a:spcPct val="100000"/>
-              </a:lnSpc>
+            <a:pPr>
               <a:spcBef>
                 <a:spcPct val="0"/>
               </a:spcBef>
-              <a:spcAft>
-                <a:spcPct val="0"/>
-              </a:spcAft>
-              <a:buClrTx/>
-              <a:buSzTx/>
-              <a:buFontTx/>
-              <a:buChar char="•"/>
-              <a:tabLst/>
             </a:pPr>
             <a:r>
               <a:rPr kumimoji="0" lang="en-US" altLang="en-US" sz="1600" i="0" u="none" strike="noStrike" cap="none" normalizeH="0" baseline="0" dirty="0" err="1">
@@ -4728,21 +4708,10 @@
             </a:r>
           </a:p>
           <a:p>
-            <a:pPr marL="0" marR="0" lvl="0" indent="0" algn="l" defTabSz="914400" rtl="0" eaLnBrk="0" fontAlgn="base" latinLnBrk="0" hangingPunct="0">
-              <a:lnSpc>
-                <a:spcPct val="100000"/>
-              </a:lnSpc>
+            <a:pPr>
               <a:spcBef>
                 <a:spcPct val="0"/>
               </a:spcBef>
-              <a:spcAft>
-                <a:spcPct val="0"/>
-              </a:spcAft>
-              <a:buClrTx/>
-              <a:buSzTx/>
-              <a:buFontTx/>
-              <a:buChar char="•"/>
-              <a:tabLst/>
             </a:pPr>
             <a:r>
               <a:rPr kumimoji="0" lang="en-US" altLang="en-US" sz="1600" i="0" u="none" strike="noStrike" cap="none" normalizeH="0" baseline="0" dirty="0">
@@ -4785,21 +4754,10 @@
             </a:r>
           </a:p>
           <a:p>
-            <a:pPr marL="0" marR="0" lvl="0" indent="0" algn="l" defTabSz="914400" rtl="0" eaLnBrk="0" fontAlgn="base" latinLnBrk="0" hangingPunct="0">
-              <a:lnSpc>
-                <a:spcPct val="100000"/>
-              </a:lnSpc>
+            <a:pPr>
               <a:spcBef>
                 <a:spcPct val="0"/>
               </a:spcBef>
-              <a:spcAft>
-                <a:spcPct val="0"/>
-              </a:spcAft>
-              <a:buClrTx/>
-              <a:buSzTx/>
-              <a:buFontTx/>
-              <a:buChar char="•"/>
-              <a:tabLst/>
             </a:pPr>
             <a:r>
               <a:rPr kumimoji="0" lang="en-US" altLang="en-US" sz="1600" i="0" u="none" strike="noStrike" cap="none" normalizeH="0" baseline="0" dirty="0">
@@ -4972,21 +4930,10 @@
             </a:r>
           </a:p>
           <a:p>
-            <a:pPr marL="0" marR="0" lvl="0" indent="0" algn="l" defTabSz="914400" rtl="0" eaLnBrk="0" fontAlgn="base" latinLnBrk="0" hangingPunct="0">
-              <a:lnSpc>
-                <a:spcPct val="100000"/>
-              </a:lnSpc>
+            <a:pPr>
               <a:spcBef>
                 <a:spcPct val="0"/>
               </a:spcBef>
-              <a:spcAft>
-                <a:spcPct val="0"/>
-              </a:spcAft>
-              <a:buClrTx/>
-              <a:buSzTx/>
-              <a:buFontTx/>
-              <a:buChar char="•"/>
-              <a:tabLst/>
             </a:pPr>
             <a:r>
               <a:rPr kumimoji="0" lang="en-US" altLang="en-US" sz="1600" i="0" u="none" strike="noStrike" cap="none" normalizeH="0" baseline="0" dirty="0" err="1">
@@ -5224,21 +5171,10 @@
             </a:r>
           </a:p>
           <a:p>
-            <a:pPr marL="0" marR="0" lvl="0" indent="0" algn="l" defTabSz="914400" rtl="0" eaLnBrk="0" fontAlgn="base" latinLnBrk="0" hangingPunct="0">
-              <a:lnSpc>
-                <a:spcPct val="100000"/>
-              </a:lnSpc>
+            <a:pPr>
               <a:spcBef>
                 <a:spcPct val="0"/>
               </a:spcBef>
-              <a:spcAft>
-                <a:spcPct val="0"/>
-              </a:spcAft>
-              <a:buClrTx/>
-              <a:buSzTx/>
-              <a:buFontTx/>
-              <a:buChar char="•"/>
-              <a:tabLst/>
             </a:pPr>
             <a:r>
               <a:rPr kumimoji="0" lang="en-US" altLang="en-US" sz="1600" i="0" u="none" strike="noStrike" cap="none" normalizeH="0" baseline="0" dirty="0" err="1">
@@ -5251,7 +5187,7 @@
                 <a:effectLst/>
                 <a:latin typeface="Arial" panose="020B0604020202020204" pitchFamily="34" charset="0"/>
               </a:rPr>
-              <a:t>Evitó</a:t>
+              <a:t>Mantiene</a:t>
             </a:r>
             <a:r>
               <a:rPr kumimoji="0" lang="en-US" altLang="en-US" sz="1600" i="0" u="none" strike="noStrike" cap="none" normalizeH="0" baseline="0" dirty="0">
@@ -5277,7 +5213,7 @@
                 <a:effectLst/>
                 <a:latin typeface="Arial" panose="020B0604020202020204" pitchFamily="34" charset="0"/>
               </a:rPr>
-              <a:t>el</a:t>
+              <a:t>buena</a:t>
             </a:r>
             <a:r>
               <a:rPr kumimoji="0" lang="en-US" altLang="en-US" sz="1600" i="0" u="none" strike="noStrike" cap="none" normalizeH="0" baseline="0" dirty="0">
@@ -5303,7 +5239,7 @@
                 <a:effectLst/>
                 <a:latin typeface="Arial" panose="020B0604020202020204" pitchFamily="34" charset="0"/>
               </a:rPr>
-              <a:t>sobreajuste</a:t>
+              <a:t>interpretabilidad</a:t>
             </a:r>
             <a:r>
               <a:rPr kumimoji="0" lang="en-US" altLang="en-US" sz="1600" i="0" u="none" strike="noStrike" cap="none" normalizeH="0" baseline="0" dirty="0">
@@ -5316,7 +5252,7 @@
                 <a:effectLst/>
                 <a:latin typeface="Arial" panose="020B0604020202020204" pitchFamily="34" charset="0"/>
               </a:rPr>
-              <a:t> de CART y la </a:t>
+              <a:t> sin </a:t>
             </a:r>
             <a:r>
               <a:rPr kumimoji="0" lang="en-US" altLang="en-US" sz="1600" i="0" u="none" strike="noStrike" cap="none" normalizeH="0" baseline="0" dirty="0" err="1">
@@ -5329,7 +5265,7 @@
                 <a:effectLst/>
                 <a:latin typeface="Arial" panose="020B0604020202020204" pitchFamily="34" charset="0"/>
               </a:rPr>
-              <a:t>pérdida</a:t>
+              <a:t>sacrificar</a:t>
             </a:r>
             <a:r>
               <a:rPr kumimoji="0" lang="en-US" altLang="en-US" sz="1600" i="0" u="none" strike="noStrike" cap="none" normalizeH="0" baseline="0" dirty="0">
@@ -5342,7 +5278,7 @@
                 <a:effectLst/>
                 <a:latin typeface="Arial" panose="020B0604020202020204" pitchFamily="34" charset="0"/>
               </a:rPr>
-              <a:t> de </a:t>
+              <a:t> </a:t>
             </a:r>
             <a:r>
               <a:rPr kumimoji="0" lang="en-US" altLang="en-US" sz="1600" i="0" u="none" strike="noStrike" cap="none" normalizeH="0" baseline="0" dirty="0" err="1">
@@ -5355,7 +5291,7 @@
                 <a:effectLst/>
                 <a:latin typeface="Arial" panose="020B0604020202020204" pitchFamily="34" charset="0"/>
               </a:rPr>
-              <a:t>información</a:t>
+              <a:t>rendimiento</a:t>
             </a:r>
             <a:r>
               <a:rPr kumimoji="0" lang="en-US" altLang="en-US" sz="1600" i="0" u="none" strike="noStrike" cap="none" normalizeH="0" baseline="0" dirty="0">
@@ -5368,7 +5304,7 @@
                 <a:effectLst/>
                 <a:latin typeface="Arial" panose="020B0604020202020204" pitchFamily="34" charset="0"/>
               </a:rPr>
-              <a:t> del Random Forest con </a:t>
+              <a:t> </a:t>
             </a:r>
             <a:r>
               <a:rPr kumimoji="0" lang="en-US" altLang="en-US" sz="1600" i="0" u="none" strike="noStrike" cap="none" normalizeH="0" baseline="0" dirty="0" err="1">
@@ -5381,7 +5317,7 @@
                 <a:effectLst/>
                 <a:latin typeface="Arial" panose="020B0604020202020204" pitchFamily="34" charset="0"/>
               </a:rPr>
-              <a:t>el</a:t>
+              <a:t>predictivo</a:t>
             </a:r>
             <a:r>
               <a:rPr kumimoji="0" lang="en-US" altLang="en-US" sz="1600" i="0" u="none" strike="noStrike" cap="none" normalizeH="0" baseline="0" dirty="0">
@@ -5394,251 +5330,14 @@
                 <a:effectLst/>
                 <a:latin typeface="Arial" panose="020B0604020202020204" pitchFamily="34" charset="0"/>
               </a:rPr>
-              <a:t> </a:t>
-            </a:r>
-            <a:r>
-              <a:rPr kumimoji="0" lang="en-US" altLang="en-US" sz="1600" i="0" u="none" strike="noStrike" cap="none" normalizeH="0" baseline="0" dirty="0" err="1">
-                <a:ln>
-                  <a:noFill/>
-                </a:ln>
-                <a:solidFill>
-                  <a:schemeClr val="tx1"/>
-                </a:solidFill>
-                <a:effectLst/>
-                <a:latin typeface="Arial" panose="020B0604020202020204" pitchFamily="34" charset="0"/>
-              </a:rPr>
-              <a:t>balanceo</a:t>
-            </a:r>
-            <a:r>
-              <a:rPr kumimoji="0" lang="en-US" altLang="en-US" sz="1600" i="0" u="none" strike="noStrike" cap="none" normalizeH="0" baseline="0" dirty="0">
-                <a:ln>
-                  <a:noFill/>
-                </a:ln>
-                <a:solidFill>
-                  <a:schemeClr val="tx1"/>
-                </a:solidFill>
-                <a:effectLst/>
-                <a:latin typeface="Arial" panose="020B0604020202020204" pitchFamily="34" charset="0"/>
-              </a:rPr>
-              <a:t> </a:t>
-            </a:r>
-            <a:r>
-              <a:rPr kumimoji="0" lang="en-US" altLang="en-US" sz="1600" i="0" u="none" strike="noStrike" cap="none" normalizeH="0" baseline="0" dirty="0" err="1">
-                <a:ln>
-                  <a:noFill/>
-                </a:ln>
-                <a:solidFill>
-                  <a:schemeClr val="tx1"/>
-                </a:solidFill>
-                <a:effectLst/>
-                <a:latin typeface="Arial" panose="020B0604020202020204" pitchFamily="34" charset="0"/>
-              </a:rPr>
-              <a:t>Downsampling</a:t>
-            </a:r>
-            <a:r>
-              <a:rPr kumimoji="0" lang="en-US" altLang="en-US" sz="1600" i="0" u="none" strike="noStrike" cap="none" normalizeH="0" baseline="0" dirty="0">
-                <a:ln>
-                  <a:noFill/>
-                </a:ln>
-                <a:solidFill>
-                  <a:schemeClr val="tx1"/>
-                </a:solidFill>
-                <a:effectLst/>
-                <a:latin typeface="Arial" panose="020B0604020202020204" pitchFamily="34" charset="0"/>
-              </a:rPr>
               <a:t>.</a:t>
             </a:r>
           </a:p>
           <a:p>
-            <a:pPr marL="0" marR="0" lvl="0" indent="0" algn="l" defTabSz="914400" rtl="0" eaLnBrk="0" fontAlgn="base" latinLnBrk="0" hangingPunct="0">
-              <a:lnSpc>
-                <a:spcPct val="100000"/>
-              </a:lnSpc>
+            <a:pPr>
               <a:spcBef>
                 <a:spcPct val="0"/>
               </a:spcBef>
-              <a:spcAft>
-                <a:spcPct val="0"/>
-              </a:spcAft>
-              <a:buClrTx/>
-              <a:buSzTx/>
-              <a:buFontTx/>
-              <a:buChar char="•"/>
-              <a:tabLst/>
-            </a:pPr>
-            <a:r>
-              <a:rPr kumimoji="0" lang="en-US" altLang="en-US" sz="1600" i="0" u="none" strike="noStrike" cap="none" normalizeH="0" baseline="0" dirty="0" err="1">
-                <a:ln>
-                  <a:noFill/>
-                </a:ln>
-                <a:solidFill>
-                  <a:schemeClr val="tx1"/>
-                </a:solidFill>
-                <a:effectLst/>
-                <a:latin typeface="Arial" panose="020B0604020202020204" pitchFamily="34" charset="0"/>
-              </a:rPr>
-              <a:t>Mantiene</a:t>
-            </a:r>
-            <a:r>
-              <a:rPr kumimoji="0" lang="en-US" altLang="en-US" sz="1600" i="0" u="none" strike="noStrike" cap="none" normalizeH="0" baseline="0" dirty="0">
-                <a:ln>
-                  <a:noFill/>
-                </a:ln>
-                <a:solidFill>
-                  <a:schemeClr val="tx1"/>
-                </a:solidFill>
-                <a:effectLst/>
-                <a:latin typeface="Arial" panose="020B0604020202020204" pitchFamily="34" charset="0"/>
-              </a:rPr>
-              <a:t> </a:t>
-            </a:r>
-            <a:r>
-              <a:rPr kumimoji="0" lang="en-US" altLang="en-US" sz="1600" i="0" u="none" strike="noStrike" cap="none" normalizeH="0" baseline="0" dirty="0" err="1">
-                <a:ln>
-                  <a:noFill/>
-                </a:ln>
-                <a:solidFill>
-                  <a:schemeClr val="tx1"/>
-                </a:solidFill>
-                <a:effectLst/>
-                <a:latin typeface="Arial" panose="020B0604020202020204" pitchFamily="34" charset="0"/>
-              </a:rPr>
-              <a:t>buena</a:t>
-            </a:r>
-            <a:r>
-              <a:rPr kumimoji="0" lang="en-US" altLang="en-US" sz="1600" i="0" u="none" strike="noStrike" cap="none" normalizeH="0" baseline="0" dirty="0">
-                <a:ln>
-                  <a:noFill/>
-                </a:ln>
-                <a:solidFill>
-                  <a:schemeClr val="tx1"/>
-                </a:solidFill>
-                <a:effectLst/>
-                <a:latin typeface="Arial" panose="020B0604020202020204" pitchFamily="34" charset="0"/>
-              </a:rPr>
-              <a:t> </a:t>
-            </a:r>
-            <a:r>
-              <a:rPr kumimoji="0" lang="en-US" altLang="en-US" sz="1600" i="0" u="none" strike="noStrike" cap="none" normalizeH="0" baseline="0" dirty="0" err="1">
-                <a:ln>
-                  <a:noFill/>
-                </a:ln>
-                <a:solidFill>
-                  <a:schemeClr val="tx1"/>
-                </a:solidFill>
-                <a:effectLst/>
-                <a:latin typeface="Arial" panose="020B0604020202020204" pitchFamily="34" charset="0"/>
-              </a:rPr>
-              <a:t>interpretabilidad</a:t>
-            </a:r>
-            <a:r>
-              <a:rPr kumimoji="0" lang="en-US" altLang="en-US" sz="1600" i="0" u="none" strike="noStrike" cap="none" normalizeH="0" baseline="0" dirty="0">
-                <a:ln>
-                  <a:noFill/>
-                </a:ln>
-                <a:solidFill>
-                  <a:schemeClr val="tx1"/>
-                </a:solidFill>
-                <a:effectLst/>
-                <a:latin typeface="Arial" panose="020B0604020202020204" pitchFamily="34" charset="0"/>
-              </a:rPr>
-              <a:t> sin </a:t>
-            </a:r>
-            <a:r>
-              <a:rPr kumimoji="0" lang="en-US" altLang="en-US" sz="1600" i="0" u="none" strike="noStrike" cap="none" normalizeH="0" baseline="0" dirty="0" err="1">
-                <a:ln>
-                  <a:noFill/>
-                </a:ln>
-                <a:solidFill>
-                  <a:schemeClr val="tx1"/>
-                </a:solidFill>
-                <a:effectLst/>
-                <a:latin typeface="Arial" panose="020B0604020202020204" pitchFamily="34" charset="0"/>
-              </a:rPr>
-              <a:t>sacrificar</a:t>
-            </a:r>
-            <a:r>
-              <a:rPr kumimoji="0" lang="en-US" altLang="en-US" sz="1600" i="0" u="none" strike="noStrike" cap="none" normalizeH="0" baseline="0" dirty="0">
-                <a:ln>
-                  <a:noFill/>
-                </a:ln>
-                <a:solidFill>
-                  <a:schemeClr val="tx1"/>
-                </a:solidFill>
-                <a:effectLst/>
-                <a:latin typeface="Arial" panose="020B0604020202020204" pitchFamily="34" charset="0"/>
-              </a:rPr>
-              <a:t> </a:t>
-            </a:r>
-            <a:r>
-              <a:rPr kumimoji="0" lang="en-US" altLang="en-US" sz="1600" i="0" u="none" strike="noStrike" cap="none" normalizeH="0" baseline="0" dirty="0" err="1">
-                <a:ln>
-                  <a:noFill/>
-                </a:ln>
-                <a:solidFill>
-                  <a:schemeClr val="tx1"/>
-                </a:solidFill>
-                <a:effectLst/>
-                <a:latin typeface="Arial" panose="020B0604020202020204" pitchFamily="34" charset="0"/>
-              </a:rPr>
-              <a:t>rendimiento</a:t>
-            </a:r>
-            <a:r>
-              <a:rPr kumimoji="0" lang="en-US" altLang="en-US" sz="1600" i="0" u="none" strike="noStrike" cap="none" normalizeH="0" baseline="0" dirty="0">
-                <a:ln>
-                  <a:noFill/>
-                </a:ln>
-                <a:solidFill>
-                  <a:schemeClr val="tx1"/>
-                </a:solidFill>
-                <a:effectLst/>
-                <a:latin typeface="Arial" panose="020B0604020202020204" pitchFamily="34" charset="0"/>
-              </a:rPr>
-              <a:t> </a:t>
-            </a:r>
-            <a:r>
-              <a:rPr kumimoji="0" lang="en-US" altLang="en-US" sz="1600" i="0" u="none" strike="noStrike" cap="none" normalizeH="0" baseline="0" dirty="0" err="1">
-                <a:ln>
-                  <a:noFill/>
-                </a:ln>
-                <a:solidFill>
-                  <a:schemeClr val="tx1"/>
-                </a:solidFill>
-                <a:effectLst/>
-                <a:latin typeface="Arial" panose="020B0604020202020204" pitchFamily="34" charset="0"/>
-              </a:rPr>
-              <a:t>predictivo</a:t>
-            </a:r>
-            <a:r>
-              <a:rPr kumimoji="0" lang="en-US" altLang="en-US" sz="1600" i="0" u="none" strike="noStrike" cap="none" normalizeH="0" baseline="0" dirty="0">
-                <a:ln>
-                  <a:noFill/>
-                </a:ln>
-                <a:solidFill>
-                  <a:schemeClr val="tx1"/>
-                </a:solidFill>
-                <a:effectLst/>
-                <a:latin typeface="Arial" panose="020B0604020202020204" pitchFamily="34" charset="0"/>
-              </a:rPr>
-              <a:t>.</a:t>
-            </a:r>
-          </a:p>
-          <a:p>
-            <a:pPr marL="0" marR="0" lvl="0" indent="0" algn="l" defTabSz="914400" rtl="0" eaLnBrk="0" fontAlgn="base" latinLnBrk="0" hangingPunct="0">
-              <a:lnSpc>
-                <a:spcPct val="100000"/>
-              </a:lnSpc>
-              <a:spcBef>
-                <a:spcPct val="0"/>
-              </a:spcBef>
-              <a:spcAft>
-                <a:spcPct val="0"/>
-              </a:spcAft>
-              <a:buClrTx/>
-              <a:buSzTx/>
-              <a:buFontTx/>
-              <a:buChar char="•"/>
-              <a:tabLst/>
             </a:pPr>
             <a:r>
               <a:rPr kumimoji="0" lang="en-US" altLang="en-US" sz="1600" i="0" u="none" strike="noStrike" cap="none" normalizeH="0" baseline="0" dirty="0" err="1">
